--- a/Unit decks/Unit 03 - SiP KISS Mapping & OKR Definition.pptx
+++ b/Unit decks/Unit 03 - SiP KISS Mapping & OKR Definition.pptx
@@ -858,6 +858,34 @@
             </a:r>
             <a:endParaRPr lang="en-US" dirty="0"/>
           </a:p>
+          <a:p/>
+          <a:p>
+            <a:r>
+              <a:t>Professional insights:</a:t>
+            </a:r>
+          </a:p>
+          <a:p/>
+          <a:p>
+            <a:r>
+              <a:t>Stopping at convenient: Execution often stops at the convenient point: the easy quick wins get delivered and the structurally difficult changes are deferred, rationalised and eventually abandoned. A strategy that is 70% executed often produces almost none of the intended transformation, because the avoided 30% is where the leverage lives.</a:t>
+            </a:r>
+          </a:p>
+          <a:p>
+            <a:r>
+              <a:t>Source: Journal, 16 April 2026 — Professional Insights: Strategy</a:t>
+            </a:r>
+          </a:p>
+          <a:p/>
+          <a:p>
+            <a:r>
+              <a:t>Claiming the destination early: Many organisations announce a new strategic direction before the systems, people and structures can support it, then spend the next phase defending a position they have not yet earned. Use this with the closing line on the slide.</a:t>
+            </a:r>
+          </a:p>
+          <a:p>
+            <a:r>
+              <a:t>Source: Journal, 14 May 2026 — Professional Insights: Strategy</a:t>
+            </a:r>
+          </a:p>
         </p:txBody>
       </p:sp>
       <p:sp>
@@ -957,6 +985,34 @@
             </a:r>
             <a:endParaRPr lang="en-US" dirty="0"/>
           </a:p>
+          <a:p/>
+          <a:p>
+            <a:r>
+              <a:t>Professional insights:</a:t>
+            </a:r>
+          </a:p>
+          <a:p/>
+          <a:p>
+            <a:r>
+              <a:t>What will feed or fight this: By the time a programme is announced, the culture that will carry it or starve it is already in place. Before launch, sit with the team that will execute it and ask: what in our current way of working will feed or fight this? Fix that before the launch date.</a:t>
+            </a:r>
+          </a:p>
+          <a:p>
+            <a:r>
+              <a:t>Source: Journal, 23 April 2026 — Professional Insights: Strategy</a:t>
+            </a:r>
+          </a:p>
+          <a:p/>
+          <a:p>
+            <a:r>
+              <a:t>Know what you have: Organisations that enter a new strategy without a clear account of what they have, what capacity exists and where the real strengths lie are navigating without an accurate map. Take stock before planning what you will do.</a:t>
+            </a:r>
+          </a:p>
+          <a:p>
+            <a:r>
+              <a:t>Source: Journal, 28 February 2026 — Professional Insights: Strategy</a:t>
+            </a:r>
+          </a:p>
         </p:txBody>
       </p:sp>
       <p:sp>
@@ -1063,6 +1119,23 @@
             </a:r>
             <a:endParaRPr lang="en-US" dirty="0"/>
           </a:p>
+          <a:p/>
+          <a:p>
+            <a:r>
+              <a:t>Professional insights:</a:t>
+            </a:r>
+          </a:p>
+          <a:p/>
+          <a:p>
+            <a:r>
+              <a:t>Sequenced execution: Great strategies are sequenced: each phase prepares for the next. Trying to do everything at once is the fastest way to produce something that resembles nothing.</a:t>
+            </a:r>
+          </a:p>
+          <a:p>
+            <a:r>
+              <a:t>Source: Journal, 5 January 2026 — Professional Insights: Strategy</a:t>
+            </a:r>
+          </a:p>
         </p:txBody>
       </p:sp>
       <p:sp>
@@ -1261,6 +1334,23 @@
 Each perspective reflects an important dimension of strategy execution. However, when these perspectives remain unexamined, the organisation begins to accumulate functional OKRs where enterprise OKRs are needed.</a:t>
             </a:r>
             <a:endParaRPr lang="en-US" dirty="0"/>
+          </a:p>
+          <a:p/>
+          <a:p>
+            <a:r>
+              <a:t>Professional insights:</a:t>
+            </a:r>
+          </a:p>
+          <a:p/>
+          <a:p>
+            <a:r>
+              <a:t>Differentiated strategy: Effective strategy addresses each team, unit and function with the specific truth about where they are and where they are headed. Generic strategy inspires no one because it is addressed to no one.</a:t>
+            </a:r>
+          </a:p>
+          <a:p>
+            <a:r>
+              <a:t>Source: Journal, 31 January 2026 — Professional Insights: Strategy</a:t>
+            </a:r>
           </a:p>
         </p:txBody>
       </p:sp>
@@ -1512,6 +1602,23 @@
             </a:r>
             <a:endParaRPr lang="en-US" dirty="0"/>
           </a:p>
+          <a:p/>
+          <a:p>
+            <a:r>
+              <a:t>Professional insights:</a:t>
+            </a:r>
+          </a:p>
+          <a:p/>
+          <a:p>
+            <a:r>
+              <a:t>No governing centre: When each function, team and leader defines success by its own standard, the cumulative result is chaos. The absence of a shared governing framework produces the worst outcomes from the most sincere efforts. Use this with “Competing definitions of success across functions”.</a:t>
+            </a:r>
+          </a:p>
+          <a:p>
+            <a:r>
+              <a:t>Source: Journal, 15 April 2026 — Professional Insights: Strategy</a:t>
+            </a:r>
+          </a:p>
         </p:txBody>
       </p:sp>
       <p:sp>
@@ -1841,6 +1948,23 @@
             </a:r>
             <a:endParaRPr lang="en-US" dirty="0"/>
           </a:p>
+          <a:p/>
+          <a:p>
+            <a:r>
+              <a:t>Professional insights:</a:t>
+            </a:r>
+          </a:p>
+          <a:p/>
+          <a:p>
+            <a:r>
+              <a:t>Listening before acting: Leaders who listen collectively before acting ground their decisions in shared conviction. Use this with Step 4, the alignment test run publicly.</a:t>
+            </a:r>
+          </a:p>
+          <a:p>
+            <a:r>
+              <a:t>Source: Journal, 28 July 2026 — Professional Insights: Leadership</a:t>
+            </a:r>
+          </a:p>
         </p:txBody>
       </p:sp>
       <p:sp>
@@ -1947,6 +2071,34 @@
             </a:r>
             <a:endParaRPr lang="en-US" dirty="0"/>
           </a:p>
+          <a:p/>
+          <a:p>
+            <a:r>
+              <a:t>Professional insights:</a:t>
+            </a:r>
+          </a:p>
+          <a:p/>
+          <a:p>
+            <a:r>
+              <a:t>Protecting attention: Organisations often lose momentum because key people let peripheral demands consume the attention needed to finish. Strategic discipline includes deciding what will not receive executive time. Use this with the low-impact cells.</a:t>
+            </a:r>
+          </a:p>
+          <a:p>
+            <a:r>
+              <a:t>Source: Journal, 8 August 2026 — Professional Insights: Strategy</a:t>
+            </a:r>
+          </a:p>
+          <a:p/>
+          <a:p>
+            <a:r>
+              <a:t>The capacity for distinction: Organisations that treat all risks as equivalent and all opportunities as equally weighted have lost an essential decision tool. Not everything deserves the same response.</a:t>
+            </a:r>
+          </a:p>
+          <a:p>
+            <a:r>
+              <a:t>Source: Journal, 24 February 2026 — Professional Insights: Strategy</a:t>
+            </a:r>
+          </a:p>
         </p:txBody>
       </p:sp>
       <p:sp>
@@ -2056,6 +2208,23 @@
 When the team looks at the scoreboard together, the focus shifts from "How do I protect my budget and team?" to "How do we move this metric?" This transition is the moment a group of high-performing individuals truly becomes a high-performing leadership team.</a:t>
             </a:r>
             <a:endParaRPr lang="en-US" dirty="0"/>
+          </a:p>
+          <a:p/>
+          <a:p>
+            <a:r>
+              <a:t>Professional insights:</a:t>
+            </a:r>
+          </a:p>
+          <a:p/>
+          <a:p>
+            <a:r>
+              <a:t>Seniority and challenge: Seniority deserves respect and stays open to challenge. Healthy leaders create room for insight from different levels and generations.</a:t>
+            </a:r>
+          </a:p>
+          <a:p>
+            <a:r>
+              <a:t>Source: Journal, 2 September 2026 — Professional Insights: Leadership</a:t>
+            </a:r>
           </a:p>
         </p:txBody>
       </p:sp>
@@ -2579,6 +2748,34 @@
             </a:r>
             <a:endParaRPr lang="en-US" dirty="0"/>
           </a:p>
+          <a:p/>
+          <a:p>
+            <a:r>
+              <a:t>Professional insights:</a:t>
+            </a:r>
+          </a:p>
+          <a:p/>
+          <a:p>
+            <a:r>
+              <a:t>The second cost: The leader who launches a strategic move without pricing every component retreats publicly when the second invoice arrives. Stress-test each initiative against the costs that do not appear on the deal sheet: the human responsibility, the cultural change and the long-term obligation. Use this when the group places items on the effort axis.</a:t>
+            </a:r>
+          </a:p>
+          <a:p>
+            <a:r>
+              <a:t>Source: Journal, 2 May 2026 — Professional Insights: Strategy</a:t>
+            </a:r>
+          </a:p>
+          <a:p/>
+          <a:p>
+            <a:r>
+              <a:t>An open door is information: Not every available opportunity deserves automatic pursuit. Test each one against readiness, priorities, capacity and surrounding conditions.</a:t>
+            </a:r>
+          </a:p>
+          <a:p>
+            <a:r>
+              <a:t>Source: Journal, 16 September 2026 — Professional Insights: Strategy</a:t>
+            </a:r>
+          </a:p>
         </p:txBody>
       </p:sp>
       <p:sp>
@@ -3186,6 +3383,45 @@
 Critical principle: Every KISS reflection must be anchored to the Success in Practice statement. Leaders evaluate the organisation against the future organisation they have collectively described.</a:t>
             </a:r>
             <a:endParaRPr lang="en-US" dirty="0"/>
+          </a:p>
+          <a:p/>
+          <a:p>
+            <a:r>
+              <a:t>Professional insights:</a:t>
+            </a:r>
+          </a:p>
+          <a:p/>
+          <a:p>
+            <a:r>
+              <a:t>KEEP: Organisations that abandon everything from their history each time a new leader arrives lose the institutional knowledge, relationships and infrastructure that took years to build. Before building new, assess what was working, what has been buried and what needs restoring.</a:t>
+            </a:r>
+          </a:p>
+          <a:p>
+            <a:r>
+              <a:t>Source: Journal, 18 January 2026 — Professional Insights: Strategy</a:t>
+            </a:r>
+          </a:p>
+          <a:p/>
+          <a:p>
+            <a:r>
+              <a:t>START and STOP together: Alignment needs the active removal of competing influences. Name what must go alongside what must be chosen: the choice is half of the alignment and the removal is the other half.</a:t>
+            </a:r>
+          </a:p>
+          <a:p>
+            <a:r>
+              <a:t>Source: Journal, 14 April 2026 — Professional Insights: Culture</a:t>
+            </a:r>
+          </a:p>
+          <a:p/>
+          <a:p>
+            <a:r>
+              <a:t>STOP · the strategic shelf: Audit the initiatives, products, partnerships and assumptions still drawing resources but no longer drawing belief, and name the two that need to be put away before the next move can land.</a:t>
+            </a:r>
+          </a:p>
+          <a:p>
+            <a:r>
+              <a:t>Source: Journal, 7 May 2026 — Professional Insights: Strategy</a:t>
+            </a:r>
           </a:p>
         </p:txBody>
       </p:sp>
@@ -3418,6 +3654,23 @@
             </a:r>
             <a:endParaRPr lang="en-US" dirty="0"/>
           </a:p>
+          <a:p/>
+          <a:p>
+            <a:r>
+              <a:t>Professional insights:</a:t>
+            </a:r>
+          </a:p>
+          <a:p/>
+          <a:p>
+            <a:r>
+              <a:t>Testable objectives: Vague strategy goals cannot be evaluated, and a strategy that cannot be tested in real time cannot be corrected in real time. Build in a specific outcome, a defined timeframe and a clear way to know whether it is working.</a:t>
+            </a:r>
+          </a:p>
+          <a:p>
+            <a:r>
+              <a:t>Source: Journal, 16 January 2026 — Professional Insights: Strategy</a:t>
+            </a:r>
+          </a:p>
         </p:txBody>
       </p:sp>
       <p:sp>
@@ -3512,6 +3765,23 @@
 Guidance: Expand the sub-accordion and walk through all four elements with participants. Then give a live example — ask a participant to state a goal they are working toward, and workshop it through the formula in real time. One concrete example does more than ten theoretical ones.</a:t>
             </a:r>
             <a:endParaRPr lang="en-US" dirty="0"/>
+          </a:p>
+          <a:p/>
+          <a:p>
+            <a:r>
+              <a:t>Professional insights:</a:t>
+            </a:r>
+          </a:p>
+          <a:p/>
+          <a:p>
+            <a:r>
+              <a:t>Specific enough to be built: Great strategies are specific enough to be built. Vague vision produces vague results. Use the formula to make each Key Result precise enough to execute and check.</a:t>
+            </a:r>
+          </a:p>
+          <a:p>
+            <a:r>
+              <a:t>Source: Journal, 8 January 2026 — Professional Insights: Strategy</a:t>
+            </a:r>
           </a:p>
         </p:txBody>
       </p:sp>

--- a/Unit decks/Unit 03 - SiP KISS Mapping & OKR Definition.pptx
+++ b/Unit decks/Unit 03 - SiP KISS Mapping & OKR Definition.pptx
@@ -656,6 +656,23 @@
             </a:r>
             <a:endParaRPr lang="en-US" dirty="0"/>
           </a:p>
+          <a:p/>
+          <a:p>
+            <a:r>
+              <a:t>Source detail (S2R® manuscript):</a:t>
+            </a:r>
+          </a:p>
+          <a:p/>
+          <a:p>
+            <a:r>
+              <a:t>How the steps chain: Step 2 defines the Objective from the themes of Step 1. Step 3 defines the Key Results from the Objective of Step 2.</a:t>
+            </a:r>
+          </a:p>
+          <a:p>
+            <a:r>
+              <a:t>Step 2 standard: Objectives should be qualitative, ambitious, action-oriented, inspirational, and memorable.</a:t>
+            </a:r>
+          </a:p>
         </p:txBody>
       </p:sp>
       <p:sp>
@@ -755,6 +772,18 @@
             </a:r>
             <a:endParaRPr lang="en-US" dirty="0"/>
           </a:p>
+          <a:p/>
+          <a:p>
+            <a:r>
+              <a:t>Source detail (S2R® manuscript):</a:t>
+            </a:r>
+          </a:p>
+          <a:p/>
+          <a:p>
+            <a:r>
+              <a:t>Where the failure sits: Most of the time, the OKR framework itself is sound. The KISS-OKR transition provides the often-missing bridge: it sets a sound, solid direction for what the organisation must achieve.</a:t>
+            </a:r>
+          </a:p>
         </p:txBody>
       </p:sp>
       <p:sp>
@@ -861,6 +890,18 @@
           <a:p/>
           <a:p>
             <a:r>
+              <a:t>Source detail (S2R® manuscript):</a:t>
+            </a:r>
+          </a:p>
+          <a:p/>
+          <a:p>
+            <a:r>
+              <a:t>The starting point: Many organisations dive into OKRs with a lot of energy, but that enthusiasm often sours into frustration.</a:t>
+            </a:r>
+          </a:p>
+          <a:p/>
+          <a:p>
+            <a:r>
               <a:t>Professional insights:</a:t>
             </a:r>
           </a:p>
@@ -1235,6 +1276,18 @@
             </a:r>
             <a:endParaRPr lang="en-US" dirty="0"/>
           </a:p>
+          <a:p/>
+          <a:p>
+            <a:r>
+              <a:t>Source detail (S2R® manuscript):</a:t>
+            </a:r>
+          </a:p>
+          <a:p/>
+          <a:p>
+            <a:r>
+              <a:t>Purpose of this step: To surface the differences between leadership roles early, so that the executive team can align on a coherent set of Objectives and Key Results that represent the enterprise as a whole.</a:t>
+            </a:r>
+          </a:p>
         </p:txBody>
       </p:sp>
       <p:sp>
@@ -1334,6 +1387,44 @@
 Each perspective reflects an important dimension of strategy execution. However, when these perspectives remain unexamined, the organisation begins to accumulate functional OKRs where enterprise OKRs are needed.</a:t>
             </a:r>
             <a:endParaRPr lang="en-US" dirty="0"/>
+          </a:p>
+          <a:p/>
+          <a:p>
+            <a:r>
+              <a:t>Source detail (S2R® manuscript):</a:t>
+            </a:r>
+          </a:p>
+          <a:p/>
+          <a:p>
+            <a:r>
+              <a:t>The starting point: Every executive leader role tends to emphasise some of the four future realities more strongly than the others.</a:t>
+            </a:r>
+          </a:p>
+          <a:p/>
+          <a:p>
+            <a:r>
+              <a:t>The four future realities:</a:t>
+            </a:r>
+          </a:p>
+          <a:p>
+            <a:r>
+              <a:t>- Customer Experience &amp; Value: how customers experience the organisation.</a:t>
+            </a:r>
+          </a:p>
+          <a:p>
+            <a:r>
+              <a:t>- Operational Capability &amp; Execution Rhythm: how the enterprise operates internally.</a:t>
+            </a:r>
+          </a:p>
+          <a:p>
+            <a:r>
+              <a:t>- People &amp; Culture Dynamics: how leaders and teams collaborate.</a:t>
+            </a:r>
+          </a:p>
+          <a:p>
+            <a:r>
+              <a:t>- Enterprise Value Creation: the outcomes that confirm success.</a:t>
+            </a:r>
           </a:p>
           <a:p/>
           <a:p>
@@ -1500,6 +1591,28 @@
             </a:r>
             <a:endParaRPr lang="en-US" dirty="0"/>
           </a:p>
+          <a:p/>
+          <a:p>
+            <a:r>
+              <a:t>Source detail (S2R® manuscript):</a:t>
+            </a:r>
+          </a:p>
+          <a:p/>
+          <a:p>
+            <a:r>
+              <a:t>Fuller wording for two cards:</a:t>
+            </a:r>
+          </a:p>
+          <a:p>
+            <a:r>
+              <a:t>COO: Objectives drift toward operational optimisation and away from strategic transformation. Alignment question: Are our OKRs reinforcing strategic movement, beyond operational performance?</a:t>
+            </a:r>
+          </a:p>
+          <a:p>
+            <a:r>
+              <a:t>CCO alignment question: Are we building repeatable value creation, beyond short-term revenue?</a:t>
+            </a:r>
+          </a:p>
         </p:txBody>
       </p:sp>
       <p:sp>
@@ -1605,6 +1718,18 @@
           <a:p/>
           <a:p>
             <a:r>
+              <a:t>Source detail (S2R® manuscript):</a:t>
+            </a:r>
+          </a:p>
+          <a:p/>
+          <a:p>
+            <a:r>
+              <a:t>Alignment Brigade insight: When the executive team recognises these natural biases, the conversation shifts from functional interpretation of success to collective definition of success.</a:t>
+            </a:r>
+          </a:p>
+          <a:p/>
+          <a:p>
+            <a:r>
               <a:t>Professional insights:</a:t>
             </a:r>
           </a:p>
@@ -1718,6 +1843,29 @@
 The goal of this session is to find the few, vital Enterprise OKRs that will shift the needle for the entire organisation. Remind the room: Departments contribute the insight — the enterprise owns the results.</a:t>
             </a:r>
             <a:endParaRPr lang="en-US" dirty="0"/>
+          </a:p>
+          <a:p/>
+          <a:p>
+            <a:r>
+              <a:t>Source detail (S2R® manuscript):</a:t>
+            </a:r>
+          </a:p>
+          <a:p/>
+          <a:p>
+            <a:r>
+              <a:t>Bringing it all together (the cross-leadership synthesis): At this point, leaders naturally start from the perspective of their own role: that is their expertise, and it is why they are at the table. The real magic happens when the team moves beyond “functional” goals. Departmental task lists are left aside in this session.</a:t>
+            </a:r>
+          </a:p>
+          <a:p>
+            <a:r>
+              <a:t>The path to synthesis: leaders build collective intelligence.</a:t>
+            </a:r>
+          </a:p>
+          <a:p/>
+          <a:p>
+            <a:r>
+              <a:t>A note for the room (continued): When the focus is on departments, the organisation just gets better silos. When the focus is on the enterprise, it actually executes its strategy.</a:t>
+            </a:r>
           </a:p>
         </p:txBody>
       </p:sp>
@@ -1951,6 +2099,24 @@
           <a:p/>
           <a:p>
             <a:r>
+              <a:t>Source detail (S2R® manuscript):</a:t>
+            </a:r>
+          </a:p>
+          <a:p/>
+          <a:p>
+            <a:r>
+              <a:t>Step 2, a further test: An Objective should not look like a line in a budget.</a:t>
+            </a:r>
+          </a:p>
+          <a:p/>
+          <a:p>
+            <a:r>
+              <a:t>Choosing what matters most (between Steps 4 and 5): Once everyone has their drafts, leaders come together to prioritise. This is where they make the tough, healthy trade-offs. The “less is more” rule keeps leaders’ energy focused and keeps teams from burning out. The constraint makes sure the energy of the entire organisation is focused on the few things that matter most.</a:t>
+            </a:r>
+          </a:p>
+          <a:p/>
+          <a:p>
+            <a:r>
               <a:t>Professional insights:</a:t>
             </a:r>
           </a:p>
@@ -2074,6 +2240,97 @@
           <a:p/>
           <a:p>
             <a:r>
+              <a:t>Source detail (S2R® manuscript):</a:t>
+            </a:r>
+          </a:p>
+          <a:p/>
+          <a:p>
+            <a:r>
+              <a:t>Purpose of Step 5: The OKR prioritisation step concentrates the organisation’s energy on the few outcomes that will most accelerate progress toward the Success in Practice (SiP). To maintain clarity and focus, the enterprise OKR set must remain deliberately small, so that competing initiatives do not disperse execution energy.</a:t>
+            </a:r>
+          </a:p>
+          <a:p/>
+          <a:p>
+            <a:r>
+              <a:t>What Step 6 does: This structured approach helps leaders distinguish between initiatives that will accelerate strategic movement and those that may consume resources without advancing the strategy meaningfully. By visualising initiatives in this way, the team ensures that execution attention remains focused on high-impact, feasible actions, and that effort is not spread across initiatives that dilute momentum.</a:t>
+            </a:r>
+          </a:p>
+          <a:p/>
+          <a:p>
+            <a:r>
+              <a:t>The nine strategic positions, with the strategic interpretation of each:</a:t>
+            </a:r>
+          </a:p>
+          <a:p>
+            <a:r>
+              <a:t>- Strategic Catalysts (high impact, low effort): quick breakthroughs that accelerate strategic momentum.</a:t>
+            </a:r>
+          </a:p>
+          <a:p>
+            <a:r>
+              <a:t>- Accelerated Enablers (high impact, medium effort): important initiatives that require coordination but deliver strong strategic value.</a:t>
+            </a:r>
+          </a:p>
+          <a:p>
+            <a:r>
+              <a:t>- Core Strategic Drivers (high impact, high effort): major transformation initiatives essential to achieving the Success in Practice.</a:t>
+            </a:r>
+          </a:p>
+          <a:p>
+            <a:r>
+              <a:t>- Quick Efficiency Plays (medium impact, low effort): improvements that enhance performance with minimal effort.</a:t>
+            </a:r>
+          </a:p>
+          <a:p>
+            <a:r>
+              <a:t>- Targeted Growth Projects (medium impact, medium effort): initiatives that contribute to strategic progress but are not immediate priorities.</a:t>
+            </a:r>
+          </a:p>
+          <a:p>
+            <a:r>
+              <a:t>- Heavy Investment Candidates (medium impact, high effort): initiatives that may require significant resources and careful timing.</a:t>
+            </a:r>
+          </a:p>
+          <a:p>
+            <a:r>
+              <a:t>- Supportive Enablers (low impact, low effort): helpful but non-critical initiatives.</a:t>
+            </a:r>
+          </a:p>
+          <a:p>
+            <a:r>
+              <a:t>- Marginal Utility Tasks (low impact, medium effort): initiatives with limited strategic return relative to the effort required.</a:t>
+            </a:r>
+          </a:p>
+          <a:p>
+            <a:r>
+              <a:t>- Resource Pitfalls (low impact, high effort): initiatives that consume significant energy without delivering meaningful strategic value.</a:t>
+            </a:r>
+          </a:p>
+          <a:p/>
+          <a:p>
+            <a:r>
+              <a:t>Guiding questions for placing an initiative:</a:t>
+            </a:r>
+          </a:p>
+          <a:p>
+            <a:r>
+              <a:t>Impact: If this initiative succeeds, how strongly will it move us toward our Success in Practice? Will customers feel the difference? Will execution speed improve? Will collaboration improve? Will enterprise value strengthen?</a:t>
+            </a:r>
+          </a:p>
+          <a:p>
+            <a:r>
+              <a:t>Effort: How much organisational coordination is required? How many functions must collaborate? What capability or system changes are required? How much leadership attention is needed?</a:t>
+            </a:r>
+          </a:p>
+          <a:p/>
+          <a:p>
+            <a:r>
+              <a:t>Insight: Beyond ranking initiatives, the Prioritisation Matrix enables the executive team to surface strategic trade-offs openly and align around the initiatives that will most accelerate progress toward the Success in Practice. When this step is completed well, the organisation leaves the session with a small set of enterprise Objectives that provide a clear execution signal to the entire organisation.</a:t>
+            </a:r>
+          </a:p>
+          <a:p/>
+          <a:p>
+            <a:r>
               <a:t>Professional insights:</a:t>
             </a:r>
           </a:p>
@@ -2208,6 +2465,38 @@
 When the team looks at the scoreboard together, the focus shifts from "How do I protect my budget and team?" to "How do we move this metric?" This transition is the moment a group of high-performing individuals truly becomes a high-performing leadership team.</a:t>
             </a:r>
             <a:endParaRPr lang="en-US" dirty="0"/>
+          </a:p>
+          <a:p/>
+          <a:p>
+            <a:r>
+              <a:t>Source detail (S2R® manuscript):</a:t>
+            </a:r>
+          </a:p>
+          <a:p/>
+          <a:p>
+            <a:r>
+              <a:t>How the landscape keeps leaders objective: further detail on four of the bias patterns.</a:t>
+            </a:r>
+          </a:p>
+          <a:p>
+            <a:r>
+              <a:t>Silo mentality: People are naturally wired to protect their own “tribe”. With the labels stripped, it becomes much harder for leaders to retreat into departmental silos.</a:t>
+            </a:r>
+          </a:p>
+          <a:p>
+            <a:r>
+              <a:t>Confirmation bias: Everyone has a tendency to look for data that supports existing department-specific beliefs. With the labels removed, each leader is forced to judge the Objective on its merit and its alignment with the Success in Practice, with preconceived notions about a specific function’s role set aside.</a:t>
+            </a:r>
+          </a:p>
+          <a:p>
+            <a:r>
+              <a:t>Curse of knowledge: When leaders write for their own functions, they often use jargon or assume context that others do not have. Filtering this out ensures the strategy remains accessible to everyone in the organisation, specialists and non-specialists alike.</a:t>
+            </a:r>
+          </a:p>
+          <a:p>
+            <a:r>
+              <a:t>Status quo bias: It is human nature to want to keep doing what has always been done. The consolidated view highlights where the team is being too safe and where it is actually pushing for the transformation the Strategy2Results® framework demands.</a:t>
+            </a:r>
           </a:p>
           <a:p/>
           <a:p>
@@ -2452,6 +2741,49 @@
             </a:r>
             <a:endParaRPr lang="en-US" dirty="0"/>
           </a:p>
+          <a:p/>
+          <a:p>
+            <a:r>
+              <a:t>Source detail (S2R® manuscript):</a:t>
+            </a:r>
+          </a:p>
+          <a:p/>
+          <a:p>
+            <a:r>
+              <a:t>The strategic shifts in full: From the KISS reflection the leadership team has identified the strategic shifts required:</a:t>
+            </a:r>
+          </a:p>
+          <a:p>
+            <a:r>
+              <a:t>1. Deliver faster and more reliable customer responsiveness.</a:t>
+            </a:r>
+          </a:p>
+          <a:p>
+            <a:r>
+              <a:t>2. Strengthen cross-functional execution speed.</a:t>
+            </a:r>
+          </a:p>
+          <a:p>
+            <a:r>
+              <a:t>3. Build enterprise-wide ownership of strategic priorities.</a:t>
+            </a:r>
+          </a:p>
+          <a:p>
+            <a:r>
+              <a:t>4. Improve operational efficiency to strengthen value creation.</a:t>
+            </a:r>
+          </a:p>
+          <a:p>
+            <a:r>
+              <a:t>These themes represent the most important changes required to achieve the SiP. The leadership team has then converted these KISS themes into Objectives.</a:t>
+            </a:r>
+          </a:p>
+          <a:p/>
+          <a:p>
+            <a:r>
+              <a:t>Reminder for the room: Each Objective is qualitative, ambitious, action-oriented and memorable. If you cannot wear it on your T-shirt, it is not worth pursuing!</a:t>
+            </a:r>
+          </a:p>
         </p:txBody>
       </p:sp>
       <p:sp>
@@ -2648,6 +2980,40 @@
             </a:r>
             <a:endParaRPr lang="en-US" dirty="0"/>
           </a:p>
+          <a:p/>
+          <a:p>
+            <a:r>
+              <a:t>Source detail (S2R® manuscript):</a:t>
+            </a:r>
+          </a:p>
+          <a:p/>
+          <a:p>
+            <a:r>
+              <a:t>De-labelling instruction: Collate the Key Results without the labels of the contributors.</a:t>
+            </a:r>
+          </a:p>
+          <a:p/>
+          <a:p>
+            <a:r>
+              <a:t>What de-labelling changes: At this point in the Strategy2Results® journey, leaders shift from individual perspectives to a single, unified view of the organisation’s future. Earlier, each brought their specific expertise to the table to propose Key Results. These contributions have been woven together and, most importantly, the departmental labels have been removed.</a:t>
+            </a:r>
+          </a:p>
+          <a:p>
+            <a:r>
+              <a:t>This is a fundamental shift in how collective intelligence is built. It reinforces a core truth of the Strategy2Results® approach of creating collective intelligence for execution: at this point, the OKRs belong to the entire enterprise.</a:t>
+            </a:r>
+          </a:p>
+          <a:p/>
+          <a:p>
+            <a:r>
+              <a:t>The Strategic Scoreboard: While each leader brings unique capabilities to the room, these goals represent the collective outcomes that, as a leadership system, they commit to delivering together. What is built now is the “Strategic Scoreboard”: the shared map of the progress the organisation needs to make to reach the Success in Practice (SiP) the leaders have co-created.</a:t>
+            </a:r>
+          </a:p>
+          <a:p>
+            <a:r>
+              <a:t>This landscape is where the “dream” gets its boots on. If the Success in Practice is the organisation’s destination and the KISS reflection is the reality check, these Enterprise OKRs are the organisation’s compass. They provide a clear signal to every person in the organisation about what truly matters, how people will know they are winning, and that everyone is moving, together, toward the future they have dared to imagine.</a:t>
+            </a:r>
+          </a:p>
         </p:txBody>
       </p:sp>
       <p:sp>
@@ -2751,6 +3117,85 @@
           <a:p/>
           <a:p>
             <a:r>
+              <a:t>Source detail (S2R® manuscript):</a:t>
+            </a:r>
+          </a:p>
+          <a:p/>
+          <a:p>
+            <a:r>
+              <a:t>The test of collective intelligence: Once the Enterprise OKR Landscape has been assembled, the leadership team enters the true test of collective intelligence: prioritisation. Up to this point, the executive team has contributed ideas, insights, and measurable outcomes. A recurring problem in many organisations is the attempt to pursue too many priorities simultaneously, which puts their OKRs in jeopardy of failing.</a:t>
+            </a:r>
+          </a:p>
+          <a:p>
+            <a:r>
+              <a:t>The question the matrix forces: The Prioritisation Matrix forces the leadership team to answer a difficult question together: “Which of these initiatives will most accelerate our movement toward the Success in Practice?”</a:t>
+            </a:r>
+          </a:p>
+          <a:p>
+            <a:r>
+              <a:t>The two dimensions as applied here: Each initiative derived from the OKR discussion is evaluated against Impact (the degree to which the initiative advances the Success in Practice) and Effort (the time, coordination, capability development, and resources required to deliver it). Plotting initiatives on this matrix allows the leadership team to see where execution energy should concentrate and where effort may be misplaced.</a:t>
+            </a:r>
+          </a:p>
+          <a:p/>
+          <a:p>
+            <a:r>
+              <a:t>What the debate reveals: The Prioritisation Matrix does more than rank initiatives. As the leadership team debates the placement of each initiative, they reveal:</a:t>
+            </a:r>
+          </a:p>
+          <a:p>
+            <a:r>
+              <a:t>- how each function interprets impact</a:t>
+            </a:r>
+          </a:p>
+          <a:p>
+            <a:r>
+              <a:t>- how each function perceives effort</a:t>
+            </a:r>
+          </a:p>
+          <a:p>
+            <a:r>
+              <a:t>- where assumptions about capability, coordination, and resources differ</a:t>
+            </a:r>
+          </a:p>
+          <a:p>
+            <a:r>
+              <a:t>These discussions are precisely where collective intelligence emerges.</a:t>
+            </a:r>
+          </a:p>
+          <a:p/>
+          <a:p>
+            <a:r>
+              <a:t>The execution signal: When the leadership team agrees on which initiatives belong in the Strategic Catalysts, Accelerated Enablers, and Core Strategic Drivers, they establish a clear enterprise execution signal. The organisation now knows:</a:t>
+            </a:r>
+          </a:p>
+          <a:p>
+            <a:r>
+              <a:t>- what must move first</a:t>
+            </a:r>
+          </a:p>
+          <a:p>
+            <a:r>
+              <a:t>- what must follow</a:t>
+            </a:r>
+          </a:p>
+          <a:p>
+            <a:r>
+              <a:t>- what must wait</a:t>
+            </a:r>
+          </a:p>
+          <a:p>
+            <a:r>
+              <a:t>- what should stop</a:t>
+            </a:r>
+          </a:p>
+          <a:p>
+            <a:r>
+              <a:t>This disciplined prioritisation ensures that the organisation’s execution energy remains focused on the initiatives that most accelerate progress toward the Success in Practice.</a:t>
+            </a:r>
+          </a:p>
+          <a:p/>
+          <a:p>
+            <a:r>
               <a:t>Professional insights:</a:t>
             </a:r>
           </a:p>
@@ -2976,6 +3421,107 @@
             </a:r>
             <a:endParaRPr lang="en-US" dirty="0"/>
           </a:p>
+          <a:p/>
+          <a:p>
+            <a:r>
+              <a:t>Source detail (S2R® manuscript):</a:t>
+            </a:r>
+          </a:p>
+          <a:p/>
+          <a:p>
+            <a:r>
+              <a:t>The unit in four stages: The SiP KISS Mapping &amp; OKR Definition unit builds the executive capability to translate strategic intent into clear, measurable, and accountable execution priorities. In the previous unit, the leadership team defined a Success in Practice (SiP): a vivid description of how the organisation will operate when the strategy succeeds. That narrative clarified the destination. This unit converts that destination into a focused execution architecture. The journey unfolds through four stages that move the leadership team from reflection to enterprise commitment.</a:t>
+            </a:r>
+          </a:p>
+          <a:p/>
+          <a:p>
+            <a:r>
+              <a:t>Awareness (What), further detail: KISS introduces a disciplined reflection:</a:t>
+            </a:r>
+          </a:p>
+          <a:p>
+            <a:r>
+              <a:t>- Keep: protect the capabilities already moving the organisation toward the SiP.</a:t>
+            </a:r>
+          </a:p>
+          <a:p>
+            <a:r>
+              <a:t>- Improve: strengthen practices that are working but require greater reliability or performance.</a:t>
+            </a:r>
+          </a:p>
+          <a:p>
+            <a:r>
+              <a:t>- Start: introduce new capabilities required to operate in the future state described by the SiP.</a:t>
+            </a:r>
+          </a:p>
+          <a:p>
+            <a:r>
+              <a:t>- Stop: eliminate activities that consume resources but do not contribute to the strategy.</a:t>
+            </a:r>
+          </a:p>
+          <a:p/>
+          <a:p>
+            <a:r>
+              <a:t>Intelligence (Why), further detail: Leaders understand why most OKR failures are reflection failures. When organisations move directly from vision to targets, they often skip the honest assessment of operational reality. The KISS-to-OKR sequence ensures that every Objective represents a real organisational shift and avoids layering additional tasks onto an already overloaded system.</a:t>
+            </a:r>
+          </a:p>
+          <a:p/>
+          <a:p>
+            <a:r>
+              <a:t>Extrapolating (Where), further detail: Leaders identify the organisational hot zones where OKR fragility most often appears. These hot zones include:</a:t>
+            </a:r>
+          </a:p>
+          <a:p>
+            <a:r>
+              <a:t>- Key Results expressed as activities where outcomes are needed</a:t>
+            </a:r>
+          </a:p>
+          <a:p>
+            <a:r>
+              <a:t>- Objectives anchored in practices that the STOP reflection already identified as obsolete</a:t>
+            </a:r>
+          </a:p>
+          <a:p>
+            <a:r>
+              <a:t>- Cross-functional Key Results without clear ownership</a:t>
+            </a:r>
+          </a:p>
+          <a:p>
+            <a:r>
+              <a:t>- Performance systems built entirely on lagging indicators, which reveal failure only after it occurs</a:t>
+            </a:r>
+          </a:p>
+          <a:p>
+            <a:r>
+              <a:t>Another predictable pattern emerges at this stage: functional bias. Customer leaders emphasise Customer Experience &amp; Value. Operational leaders emphasise Execution Rhythm. People leaders emphasise Culture and Capability. Financial leaders emphasise Enterprise Value Creation. Individually these perspectives are valid.</a:t>
+            </a:r>
+          </a:p>
+          <a:p/>
+          <a:p>
+            <a:r>
+              <a:t>Integration (Collective), further detail: The executive team synthesises their insights to produce a single enterprise OKR architecture. The team tests every Objective and Key Result against three questions:</a:t>
+            </a:r>
+          </a:p>
+          <a:p>
+            <a:r>
+              <a:t>- Does this move us closer to our Success in Practice?</a:t>
+            </a:r>
+          </a:p>
+          <a:p>
+            <a:r>
+              <a:t>- Does it strengthen the whole organisational system, beyond one function?</a:t>
+            </a:r>
+          </a:p>
+          <a:p>
+            <a:r>
+              <a:t>- Is the outcome measurable, owned, and achievable through coordinated execution?</a:t>
+            </a:r>
+          </a:p>
+          <a:p>
+            <a:r>
+              <a:t>This stage converts individual expertise into collective leadership intelligence.</a:t>
+            </a:r>
+          </a:p>
         </p:txBody>
       </p:sp>
       <p:sp>
@@ -3277,6 +3823,18 @@
             </a:r>
             <a:endParaRPr lang="en-US" dirty="0"/>
           </a:p>
+          <a:p/>
+          <a:p>
+            <a:r>
+              <a:t>Source detail (S2R® manuscript):</a:t>
+            </a:r>
+          </a:p>
+          <a:p/>
+          <a:p>
+            <a:r>
+              <a:t>Where the team stands: At this stage of the journey, the leadership team has produced a Strategy Intent statement and Success in Practice (SiP) narrative.</a:t>
+            </a:r>
+          </a:p>
         </p:txBody>
       </p:sp>
       <p:sp>
@@ -3383,6 +3941,18 @@
 Critical principle: Every KISS reflection must be anchored to the Success in Practice statement. Leaders evaluate the organisation against the future organisation they have collectively described.</a:t>
             </a:r>
             <a:endParaRPr lang="en-US" dirty="0"/>
+          </a:p>
+          <a:p/>
+          <a:p>
+            <a:r>
+              <a:t>Source detail (S2R® manuscript):</a:t>
+            </a:r>
+          </a:p>
+          <a:p/>
+          <a:p>
+            <a:r>
+              <a:t>Why the anchor matters: By grounding the KISS reflection in the SiP narrative, the organisation ensures that its execution agenda is directly aligned with the future it intends to build. KISS examines the current organisation in relation to that future.</a:t>
+            </a:r>
           </a:p>
           <a:p/>
           <a:p>
@@ -3657,6 +4227,23 @@
           <a:p/>
           <a:p>
             <a:r>
+              <a:t>Source detail (S2R® manuscript):</a:t>
+            </a:r>
+          </a:p>
+          <a:p/>
+          <a:p>
+            <a:r>
+              <a:t>Title of the framework: “The Objective Key Results Framework: From Intent to Traction”.</a:t>
+            </a:r>
+          </a:p>
+          <a:p>
+            <a:r>
+              <a:t>Insight: The discipline of OKRs lies in their simplicity. Objectives express the strategic ambition. Key Results define what success looks like and by when. Together they convert the insights from Success in Practice and the KISS reflection into a focused execution agenda that aligns the entire organisation around measurable progress.</a:t>
+            </a:r>
+          </a:p>
+          <a:p/>
+          <a:p>
+            <a:r>
               <a:t>Professional insights:</a:t>
             </a:r>
           </a:p>
@@ -3765,6 +4352,18 @@
 Guidance: Expand the sub-accordion and walk through all four elements with participants. Then give a live example — ask a participant to state a goal they are working toward, and workshop it through the formula in real time. One concrete example does more than ten theoretical ones.</a:t>
             </a:r>
             <a:endParaRPr lang="en-US" dirty="0"/>
+          </a:p>
+          <a:p/>
+          <a:p>
+            <a:r>
+              <a:t>Source detail (S2R® manuscript):</a:t>
+            </a:r>
+          </a:p>
+          <a:p/>
+          <a:p>
+            <a:r>
+              <a:t>Example Key Result in full: Increase digital transaction completion rate from 40% to 75% of total transactions by Q4 2026.</a:t>
+            </a:r>
           </a:p>
           <a:p/>
           <a:p>

--- a/Unit decks/Unit 03 - SiP KISS Mapping & OKR Definition.pptx
+++ b/Unit decks/Unit 03 - SiP KISS Mapping & OKR Definition.pptx
@@ -38,11 +38,11 @@
     <p:sldId id="277" r:id="rId29"/>
     <p:sldId id="301" r:id="rId30"/>
     <p:sldId id="289" r:id="rId31"/>
+    <p:sldId id="284" r:id="rId35"/>
+    <p:sldId id="285" r:id="rId36"/>
     <p:sldId id="279" r:id="rId32"/>
     <p:sldId id="280" r:id="rId33"/>
     <p:sldId id="302" r:id="rId34"/>
-    <p:sldId id="284" r:id="rId35"/>
-    <p:sldId id="285" r:id="rId36"/>
     <p:sldId id="286" r:id="rId37"/>
   </p:sldIdLst>
   <p:sldSz cx="12192000" cy="6858000"/>
@@ -352,13 +352,13 @@
           <a:p>
             <a:r>
               <a:rPr lang="en-GB" dirty="0"/>
-              <a:t>2. Participants then go to the portal and complete their own page, in the session or after it: the reflections, the matching exercise, the group work of Section 4 and their own Strategy Airport learning round.</a:t>
-            </a:r>
-          </a:p>
-          <a:p>
-            <a:r>
-              <a:rPr lang="en-GB" dirty="0"/>
-              <a:t>3. Section 4 on the portal is group work for the Capstone. The group agrees each entry and one member acts as scribe.</a:t>
+              <a:t>2. Participants then go to the portal and complete their own page, in the session or after it: the reflections, the matching exercise, the group work of Section 5 and their own Strategy Airport learning round.</a:t>
+            </a:r>
+          </a:p>
+          <a:p>
+            <a:r>
+              <a:rPr lang="en-GB" dirty="0"/>
+              <a:t>3. Section 5 on the portal is group work for the Capstone. The group agrees each entry and one member acts as scribe.</a:t>
             </a:r>
           </a:p>
           <a:p>
@@ -370,7 +370,7 @@
           <a:p>
             <a:r>
               <a:rPr lang="en-GB" dirty="0"/>
-              <a:t>4. The matching exercise in Section 3 and the game in Section 5 are portfolio work.</a:t>
+              <a:t>4. The matching exercise in Section 3 and the game in Section 4 are portfolio work.</a:t>
             </a:r>
           </a:p>
           <a:p>
@@ -400,7 +400,7 @@
           <a:p>
             <a:r>
               <a:rPr lang="en-GB" dirty="0"/>
-              <a:t>- Have the facilitator file ready in your browser at Section 5, so that the Strategy Airport game can be shared when you reach it.</a:t>
+              <a:t>- Have the facilitator file ready in your browser at Section 4, so that the Strategy Airport game can be shared when you reach it.</a:t>
             </a:r>
           </a:p>
           <a:p>
@@ -1501,7 +1501,7 @@
           <a:p>
             <a:r>
               <a:rPr lang="en-GB" dirty="0"/>
-              <a:t>1. Recognise the benefits of mapping the terrain before setting goals.</a:t>
+              <a:t>1. Map the strategic terrain before setting goals.</a:t>
             </a:r>
           </a:p>
           <a:p>
@@ -3485,25 +3485,25 @@
           <a:p>
             <a:r>
               <a:rPr lang="en-GB" dirty="0"/>
-              <a:t>- Outcome 1 is built in 1.2 and 1.3 (the four KISS filters and the four SiP domains) and produced in 4.1 (the group’s KISS map).</a:t>
-            </a:r>
-          </a:p>
-          <a:p>
-            <a:r>
-              <a:rPr lang="en-GB" dirty="0"/>
-              <a:t>- Outcome 2 is built in 1.5 (the five steps and the Prioritisation Matrix) and in Section 3 (the natural emphasis of each leadership role), and produced in 4.2 (the Enterprise Priorities).</a:t>
-            </a:r>
-          </a:p>
-          <a:p>
-            <a:r>
-              <a:rPr lang="en-GB" dirty="0"/>
-              <a:t>- Outcome 3 is built in 1.4 (Objectives and Key Results) and produced in 4.2 (the Enterprise OKRs) and in 5.1 (the Strategy Airport flight plan).</a:t>
-            </a:r>
-          </a:p>
-          <a:p>
-            <a:r>
-              <a:rPr lang="en-GB" dirty="0"/>
-              <a:t>- Outcome 4 is shown in 2.2 (the worked example, from one SiP statement to its OKRs) and produced in 4.2, where every Key Result names its contributing roles.</a:t>
+              <a:t>- Outcome 1 is built in 1.2 and 1.3 (the four KISS filters and the four SiP domains) and produced in 5.1 (the group’s KISS map).</a:t>
+            </a:r>
+          </a:p>
+          <a:p>
+            <a:r>
+              <a:rPr lang="en-GB" dirty="0"/>
+              <a:t>- Outcome 2 is built in 1.5 (the five steps and the Prioritisation Matrix) and in Section 3 (the natural emphasis of each leadership role), and produced in 5.2 (the Enterprise Priorities).</a:t>
+            </a:r>
+          </a:p>
+          <a:p>
+            <a:r>
+              <a:rPr lang="en-GB" dirty="0"/>
+              <a:t>- Outcome 3 is built in 1.4 (Objectives and Key Results) and produced in 5.2 (the Enterprise OKRs) and in 4.1 (the Strategy Airport flight plan).</a:t>
+            </a:r>
+          </a:p>
+          <a:p>
+            <a:r>
+              <a:rPr lang="en-GB" dirty="0"/>
+              <a:t>- Outcome 4 is shown in 2.2 (the worked example, from one SiP statement to its OKRs) and produced in 5.2, where every Key Result names its contributing roles.</a:t>
             </a:r>
           </a:p>
           <a:p>
@@ -5558,13 +5558,13 @@
           <a:p>
             <a:r>
               <a:rPr lang="en-GB" b="1" dirty="0"/>
-              <a:t>5. Bridge to Section 4.</a:t>
-            </a:r>
-          </a:p>
-          <a:p>
-            <a:r>
-              <a:rPr lang="en-GB" dirty="0"/>
-              <a:t>Say: "We know the filter, the building blocks, the steps and our own biases. Section 4 is where your group builds."</a:t>
+              <a:t>5. Bridge to Section 5.</a:t>
+            </a:r>
+          </a:p>
+          <a:p>
+            <a:r>
+              <a:rPr lang="en-GB" dirty="0"/>
+              <a:t>Say: "We know the filter, the building blocks, the steps and our own biases. Section 5 is where your group builds."</a:t>
             </a:r>
           </a:p>
           <a:p>
@@ -5664,7 +5664,7 @@
           <a:p>
             <a:r>
               <a:rPr lang="en-GB" b="1" dirty="0"/>
-              <a:t>SECTION 4 · INTEGRATION — COLLECTIVE</a:t>
+              <a:t>SECTION 5 · APPLICATION — IN PRACTICE</a:t>
             </a:r>
           </a:p>
           <a:p>
@@ -5679,25 +5679,25 @@
           <a:p>
             <a:r>
               <a:rPr lang="en-GB" dirty="0"/>
-              <a:t>1. 4.1a: how the group works. One scribe, agreed entries, every member’s own page.</a:t>
-            </a:r>
-          </a:p>
-          <a:p>
-            <a:r>
-              <a:rPr lang="en-GB" dirty="0"/>
-              <a:t>2. 4.1b: Translating SiP to KISS. The group’s four SiP statements, the sixteen entries of the KISS map, and its confirmation.</a:t>
-            </a:r>
-          </a:p>
-          <a:p>
-            <a:r>
-              <a:rPr lang="en-GB" dirty="0"/>
-              <a:t>3. 4.2a: Translating KISS to OKRs through the five steps.</a:t>
-            </a:r>
-          </a:p>
-          <a:p>
-            <a:r>
-              <a:rPr lang="en-GB" dirty="0"/>
-              <a:t>4. 4.2b: the three confirmed outputs, and how they reach the Capstone.</a:t>
+              <a:t>1. 5.1a: how the group works. One scribe, agreed entries, every member’s own page.</a:t>
+            </a:r>
+          </a:p>
+          <a:p>
+            <a:r>
+              <a:rPr lang="en-GB" dirty="0"/>
+              <a:t>2. 5.1b: Translating SiP to KISS. The group’s four SiP statements, the sixteen entries of the KISS map, and its confirmation.</a:t>
+            </a:r>
+          </a:p>
+          <a:p>
+            <a:r>
+              <a:rPr lang="en-GB" dirty="0"/>
+              <a:t>3. 5.2a: Translating KISS to OKRs through the five steps.</a:t>
+            </a:r>
+          </a:p>
+          <a:p>
+            <a:r>
+              <a:rPr lang="en-GB" dirty="0"/>
+              <a:t>4. 5.2b: the three confirmed outputs, and how they reach the Capstone.</a:t>
             </a:r>
           </a:p>
           <a:p>
@@ -5802,7 +5802,7 @@
                 <a:ea typeface="+mn-ea"/>
                 <a:cs typeface="+mn-cs"/>
               </a:rPr>
-              <a:t>Gain collective intelligence for the strategic trajectory.</a:t>
+              <a:t>Draw on collective intelligence to shape the strategic trajectory.</a:t>
             </a:r>
           </a:p>
           <a:p>
@@ -5823,7 +5823,7 @@
           <a:p>
             <a:r>
               <a:rPr lang="en-GB" dirty="0"/>
-              <a:t>- 4.1 — Translating SiP to KISS: pass each of your four SiP statements through the four KISS filters and confirm your KISS map.</a:t>
+              <a:t>- 5.1 — Translating SiP to KISS: pass each of your four SiP statements through the four KISS filters and confirm your KISS map.</a:t>
             </a:r>
           </a:p>
           <a:p>
@@ -5832,7 +5832,7 @@
           <a:p>
             <a:r>
               <a:rPr lang="en-GB" dirty="0"/>
-              <a:t>- 4.2 — Translating KISS to OKRs: The five Steps: convert the confirmed KISS map into Enterprise Priorities and Enterprise OKRs.</a:t>
+              <a:t>- 5.2 — Translating KISS to OKRs: The five Steps: convert the confirmed KISS map into Enterprise Priorities and Enterprise OKRs.</a:t>
             </a:r>
           </a:p>
           <a:p>
@@ -6009,7 +6009,7 @@
           <a:p>
             <a:r>
               <a:rPr lang="en-GB" dirty="0"/>
-              <a:t>2. Say plainly that Sections 1 to 3 prepare the thinking, Section 4 is where each group produces its outputs for the Capstone, and Section 5 is a game: played first with the room, then by each participant alone.</a:t>
+              <a:t>2. Say plainly that Sections 1 to 3 prepare the thinking, Section 5 is where each group produces its outputs for the Capstone, and Section 4 is a game: played first with the room, then by each participant alone.</a:t>
             </a:r>
           </a:p>
           <a:p>
@@ -6077,7 +6077,7 @@
             </a:r>
             <a:r>
               <a:rPr lang="en-GB" dirty="0"/>
-              <a:t>— Collective: each group translates its Success in Practice into a KISS map, follows the five steps to convert to prioritised OKRs</a:t>
+              <a:t>— Collective: the Strategy Airport game, played with the room in the lesson and then by each participant alone.</a:t>
             </a:r>
           </a:p>
           <a:p>
@@ -6094,7 +6094,7 @@
             </a:r>
             <a:r>
               <a:rPr lang="en-GB" dirty="0"/>
-              <a:t>— In Practice: the Strategy Airport game, played with the room in the lesson and then by each participant alone.</a:t>
+              <a:t>— In Practice: each group translates its Success in Practice into a KISS map, follows the five steps to convert to prioritised OKRs</a:t>
             </a:r>
           </a:p>
         </p:txBody>
@@ -6188,7 +6188,7 @@
           <a:p>
             <a:r>
               <a:rPr lang="en-GB" b="1" dirty="0"/>
-              <a:t>4.1 — TRANSLATING SiP TO KISS · HOW THE GROUP WORKS</a:t>
+              <a:t>5.1 — TRANSLATING SiP TO KISS · HOW THE GROUP WORKS</a:t>
             </a:r>
           </a:p>
           <a:p>
@@ -6401,7 +6401,7 @@
           <a:p>
             <a:r>
               <a:rPr lang="en-GB" b="1" dirty="0"/>
-              <a:t>4.2 — TRANSLATING KISS TO OKRs: THE FIVE STEPS (5 STEPS · GROUP WORK)</a:t>
+              <a:t>5.2 — TRANSLATING KISS TO OKRs: THE FIVE STEPS (5 STEPS · GROUP WORK)</a:t>
             </a:r>
           </a:p>
           <a:p>
@@ -6614,7 +6614,7 @@
           <a:p>
             <a:r>
               <a:rPr lang="en-GB" dirty="0"/>
-              <a:t>In 4.2 of the participant file, the group works through the five steps:</a:t>
+              <a:t>In 5.2 of the participant file, the group works through the five steps:</a:t>
             </a:r>
           </a:p>
           <a:p>
@@ -6795,7 +6795,7 @@
           <a:p>
             <a:r>
               <a:rPr lang="en-GB" b="1" dirty="0"/>
-              <a:t>SECTION 5 · APPLICATION — IN PRACTICE</a:t>
+              <a:t>SECTION 4 · INTEGRATION — COLLECTIVE</a:t>
             </a:r>
           </a:p>
           <a:p>
@@ -6810,7 +6810,7 @@
           <a:p>
             <a:r>
               <a:rPr lang="en-GB" dirty="0"/>
-              <a:t>1. 5.1: the Strategy Airport game. You play one learning round with the room, from the facilitator file.</a:t>
+              <a:t>1. 4.1: the Strategy Airport game. You play one learning round with the room, from the facilitator file.</a:t>
             </a:r>
           </a:p>
           <a:p>
@@ -6888,7 +6888,7 @@
                 <a:ea typeface="+mn-ea"/>
                 <a:cs typeface="+mn-cs"/>
               </a:rPr>
-              <a:t>Reinforce strategy translation capability.</a:t>
+              <a:t>Translate strategic intent into measurable results for their own strategy.</a:t>
             </a:r>
           </a:p>
           <a:p>
@@ -6903,7 +6903,7 @@
                 <a:ea typeface="+mn-ea"/>
                 <a:cs typeface="+mn-cs"/>
               </a:rPr>
-              <a:t>Establish individual capability to set a strategic trajectory.</a:t>
+              <a:t>Set a strategic trajectory with clear objectives and measurable results.</a:t>
             </a:r>
           </a:p>
           <a:p>
@@ -6918,7 +6918,7 @@
           <a:p>
             <a:r>
               <a:rPr lang="en-GB" dirty="0"/>
-              <a:t>Say: "Section 4 is collective: one group, one position. Section 5 is individual: one participant, one learning round."</a:t>
+              <a:t>Say: "Section 5 is collective: one group, one position. Section 4 is individual: one participant, one learning round."</a:t>
             </a:r>
           </a:p>
         </p:txBody>
@@ -7012,7 +7012,7 @@
           <a:p>
             <a:r>
               <a:rPr lang="en-GB" b="1" dirty="0"/>
-              <a:t>5.1 — STRATEGY AIRPORT (2 GATES · LEARNING ROUND)</a:t>
+              <a:t>4.1 — STRATEGY AIRPORT (2 GATES · LEARNING ROUND)</a:t>
             </a:r>
           </a:p>
           <a:p>
@@ -7036,7 +7036,7 @@
           <a:p>
             <a:r>
               <a:rPr lang="en-GB" dirty="0"/>
-              <a:t>Stop sharing the deck and share the browser window that holds the facilitator file, at Section 5. </a:t>
+              <a:t>Stop sharing the deck and share the browser window that holds the facilitator file, at Section 4. </a:t>
             </a:r>
           </a:p>
           <a:p>
@@ -7270,7 +7270,7 @@
           <a:p>
             <a:r>
               <a:rPr lang="en-GB" dirty="0"/>
-              <a:t>Say: "After the teaching, each of you plays one learning round alone, in 5.1 of your own page.</a:t>
+              <a:t>Say: "After the teaching, each of you plays one learning round alone, in 4.1 of your own page.</a:t>
             </a:r>
           </a:p>
           <a:p>
@@ -7303,7 +7303,7 @@
           <a:p>
             <a:r>
               <a:rPr lang="en-GB" dirty="0"/>
-              <a:t>Each participant plays one Strategy Airport learning round alone in 5.1 of the participant file and clears both gates.</a:t>
+              <a:t>Each participant plays one Strategy Airport learning round alone in 4.1 of the participant file and clears both gates.</a:t>
             </a:r>
           </a:p>
           <a:p>
@@ -7648,19 +7648,19 @@
           <a:p>
             <a:r>
               <a:rPr lang="en-GB" dirty="0"/>
-              <a:t>- A confirmed KISS map from each group (4.1)</a:t>
-            </a:r>
-          </a:p>
-          <a:p>
-            <a:r>
-              <a:rPr lang="en-GB" dirty="0"/>
-              <a:t>- Confirmed Enterprise Priorities and Enterprise OKRs from each group: maximum 4 Objectives, maximum 2 Key Results each (4.2)</a:t>
-            </a:r>
-          </a:p>
-          <a:p>
-            <a:r>
-              <a:rPr lang="en-GB" dirty="0"/>
-              <a:t>- A completed Strategy Airport learning round from each participant (5.1)</a:t>
+              <a:t>- A confirmed KISS map from each group (5.1)</a:t>
+            </a:r>
+          </a:p>
+          <a:p>
+            <a:r>
+              <a:rPr lang="en-GB" dirty="0"/>
+              <a:t>- Confirmed Enterprise Priorities and Enterprise OKRs from each group: maximum 4 Objectives, maximum 2 Key Results each (5.2)</a:t>
+            </a:r>
+          </a:p>
+          <a:p>
+            <a:r>
+              <a:rPr lang="en-GB" dirty="0"/>
+              <a:t>- A completed Strategy Airport learning round from each participant (4.1)</a:t>
             </a:r>
           </a:p>
           <a:p>
@@ -8594,7 +8594,7 @@
           <a:p>
             <a:r>
               <a:rPr lang="en-GB" dirty="0"/>
-              <a:t>Tell participants: this is the standard for every entry their group makes in Section 4.</a:t>
+              <a:t>Tell participants: this is the standard for every entry their group makes in Section 5.</a:t>
             </a:r>
           </a:p>
           <a:p>
@@ -8749,7 +8749,7 @@
           <a:p>
             <a:r>
               <a:rPr lang="en-GB" dirty="0"/>
-              <a:t>Tell participants: this is the preparation for the KISS map their group builds in Section 4.</a:t>
+              <a:t>Tell participants: this is the preparation for the KISS map their group builds in Section 5.</a:t>
             </a:r>
           </a:p>
           <a:p>
@@ -18323,7 +18323,7 @@
                 <a:ea typeface="Calibri" pitchFamily="34" charset="-122"/>
                 <a:cs typeface="Calibri" pitchFamily="34" charset="-120"/>
               </a:rPr>
-              <a:t>Recognise the benefits of mapping the terrain before setting goals.</a:t>
+              <a:t>Map the strategic terrain before setting goals.</a:t>
             </a:r>
             <a:endParaRPr lang="en-US" sz="2400" dirty="0"/>
           </a:p>
@@ -39174,7 +39174,7 @@
 
 <file path=ppt/slides/slide29.xml><?xml version="1.0" encoding="utf-8"?>
 <p:sld xmlns:a="http://schemas.openxmlformats.org/drawingml/2006/main" xmlns:r="http://schemas.openxmlformats.org/officeDocument/2006/relationships" xmlns:p="http://schemas.openxmlformats.org/presentationml/2006/main">
-  <p:cSld name="Slide 24">
+  <p:cSld name="Slide 29">
     <p:bg>
       <p:bgPr>
         <a:solidFill>
@@ -39347,7 +39347,7 @@
                 <a:ea typeface="Calibri" pitchFamily="34" charset="-122"/>
                 <a:cs typeface="Calibri" pitchFamily="34" charset="-120"/>
               </a:rPr>
-              <a:t>Building Collective Intelligence: From SiP to KISS to Enterprise OKRs</a:t>
+              <a:t>Strategy Airport: From Strategic Imagination to Operational Clearance</a:t>
             </a:r>
             <a:endParaRPr lang="en-US" sz="2600" dirty="0"/>
           </a:p>
@@ -39473,7 +39473,7 @@
               <a:buNone/>
             </a:pPr>
             <a:r>
-              <a:rPr lang="en-GB" sz="2400" dirty="0">
+              <a:rPr lang="en-US" sz="2400" dirty="0">
                 <a:solidFill>
                   <a:srgbClr val="FFFFFF"/>
                 </a:solidFill>
@@ -39481,29 +39481,7 @@
                 <a:ea typeface="Calibri" pitchFamily="34" charset="-122"/>
                 <a:cs typeface="Calibri" pitchFamily="34" charset="-120"/>
               </a:rPr>
-              <a:t>Apply the translation of </a:t>
-            </a:r>
-            <a:r>
-              <a:rPr lang="en-GB" sz="2400" dirty="0" err="1">
-                <a:solidFill>
-                  <a:srgbClr val="FFFFFF"/>
-                </a:solidFill>
-                <a:latin typeface="Calibri" pitchFamily="34" charset="0"/>
-                <a:ea typeface="Calibri" pitchFamily="34" charset="-122"/>
-                <a:cs typeface="Calibri" pitchFamily="34" charset="-120"/>
-              </a:rPr>
-              <a:t>SiP</a:t>
-            </a:r>
-            <a:r>
-              <a:rPr lang="en-GB" sz="2400" dirty="0">
-                <a:solidFill>
-                  <a:srgbClr val="FFFFFF"/>
-                </a:solidFill>
-                <a:latin typeface="Calibri" pitchFamily="34" charset="0"/>
-                <a:ea typeface="Calibri" pitchFamily="34" charset="-122"/>
-                <a:cs typeface="Calibri" pitchFamily="34" charset="-120"/>
-              </a:rPr>
-              <a:t> into OKRs as a group.</a:t>
+              <a:t>Translate strategic intent into measurable results for their own strategy.</a:t>
             </a:r>
           </a:p>
         </p:txBody>
@@ -39597,9 +39575,8 @@
                 <a:ea typeface="Calibri" pitchFamily="34" charset="-122"/>
                 <a:cs typeface="Calibri" pitchFamily="34" charset="-120"/>
               </a:rPr>
-              <a:t>Gain collective intelligence for the strategic trajectory.</a:t>
-            </a:r>
-            <a:endParaRPr lang="en-US" sz="2400" dirty="0"/>
+              <a:t>Set a strategic trajectory with clear objectives and measurable results.</a:t>
+            </a:r>
           </a:p>
         </p:txBody>
       </p:sp>
@@ -40215,6 +40192,926 @@
 
 <file path=ppt/slides/slide30.xml><?xml version="1.0" encoding="utf-8"?>
 <p:sld xmlns:a="http://schemas.openxmlformats.org/drawingml/2006/main" xmlns:r="http://schemas.openxmlformats.org/officeDocument/2006/relationships" xmlns:p="http://schemas.openxmlformats.org/presentationml/2006/main">
+  <p:cSld name="Slide 30">
+    <p:bg>
+      <p:bgPr>
+        <a:solidFill>
+          <a:srgbClr val="FFFFFF"/>
+        </a:solidFill>
+        <a:effectLst/>
+      </p:bgPr>
+    </p:bg>
+    <p:spTree>
+      <p:nvGrpSpPr>
+        <p:cNvPr id="1" name=""/>
+        <p:cNvGrpSpPr/>
+        <p:nvPr/>
+      </p:nvGrpSpPr>
+      <p:grpSpPr>
+        <a:xfrm>
+          <a:off x="0" y="0"/>
+          <a:ext cx="0" cy="0"/>
+          <a:chOff x="0" y="0"/>
+          <a:chExt cx="0" cy="0"/>
+        </a:xfrm>
+      </p:grpSpPr>
+      <p:sp>
+        <p:nvSpPr>
+          <p:cNvPr id="2" name="Text 0"/>
+          <p:cNvSpPr txBox="1"/>
+          <p:nvPr/>
+        </p:nvSpPr>
+        <p:spPr>
+          <a:xfrm>
+            <a:off x="548640" y="411480"/>
+            <a:ext cx="11064240" cy="868680"/>
+          </a:xfrm>
+          <a:prstGeom prst="rect">
+            <a:avLst/>
+          </a:prstGeom>
+          <a:noFill/>
+          <a:ln/>
+        </p:spPr>
+        <p:txBody>
+          <a:bodyPr wrap="square" lIns="0" tIns="0" rIns="0" bIns="0" rtlCol="0" anchor="ctr"/>
+          <a:lstStyle/>
+          <a:p>
+            <a:pPr marL="0" indent="0">
+              <a:buNone/>
+            </a:pPr>
+            <a:r>
+              <a:rPr lang="en-US" sz="3600" b="1" dirty="0">
+                <a:solidFill>
+                  <a:srgbClr val="1A5C2C"/>
+                </a:solidFill>
+                <a:latin typeface="Cambria" pitchFamily="34" charset="0"/>
+                <a:ea typeface="Cambria" pitchFamily="34" charset="-122"/>
+                <a:cs typeface="Cambria" pitchFamily="34" charset="-120"/>
+              </a:rPr>
+              <a:t>4.1 · Strategy Airport</a:t>
+            </a:r>
+            <a:endParaRPr lang="en-US" sz="3600" dirty="0"/>
+          </a:p>
+        </p:txBody>
+      </p:sp>
+      <p:sp>
+        <p:nvSpPr>
+          <p:cNvPr id="3" name="Shape 1"/>
+          <p:cNvSpPr/>
+          <p:nvPr/>
+        </p:nvSpPr>
+        <p:spPr>
+          <a:xfrm>
+            <a:off x="548640" y="1508760"/>
+            <a:ext cx="5408676" cy="3931920"/>
+          </a:xfrm>
+          <a:prstGeom prst="roundRect">
+            <a:avLst>
+              <a:gd name="adj" fmla="val 2326"/>
+            </a:avLst>
+          </a:prstGeom>
+          <a:solidFill>
+            <a:srgbClr val="EEF4EF"/>
+          </a:solidFill>
+          <a:ln w="12700">
+            <a:solidFill>
+              <a:srgbClr val="EEF4EF"/>
+            </a:solidFill>
+            <a:prstDash val="solid"/>
+          </a:ln>
+        </p:spPr>
+        <p:txBody>
+          <a:bodyPr/>
+          <a:lstStyle/>
+          <a:p>
+            <a:endParaRPr lang="en-ZA"/>
+          </a:p>
+        </p:txBody>
+      </p:sp>
+      <p:sp>
+        <p:nvSpPr>
+          <p:cNvPr id="4" name="Shape 2"/>
+          <p:cNvSpPr/>
+          <p:nvPr/>
+        </p:nvSpPr>
+        <p:spPr>
+          <a:xfrm>
+            <a:off x="777240" y="1737360"/>
+            <a:ext cx="640080" cy="640080"/>
+          </a:xfrm>
+          <a:prstGeom prst="ellipse">
+            <a:avLst/>
+          </a:prstGeom>
+          <a:solidFill>
+            <a:srgbClr val="1A5C2C"/>
+          </a:solidFill>
+          <a:ln w="12700">
+            <a:solidFill>
+              <a:srgbClr val="1A5C2C"/>
+            </a:solidFill>
+            <a:prstDash val="solid"/>
+          </a:ln>
+        </p:spPr>
+        <p:txBody>
+          <a:bodyPr/>
+          <a:lstStyle/>
+          <a:p>
+            <a:endParaRPr lang="en-ZA"/>
+          </a:p>
+        </p:txBody>
+      </p:sp>
+      <p:pic>
+        <p:nvPicPr>
+          <p:cNvPr id="5" name="Image 0" descr="preencoded.png"/>
+          <p:cNvPicPr>
+            <a:picLocks noChangeAspect="1"/>
+          </p:cNvPicPr>
+          <p:nvPr/>
+        </p:nvPicPr>
+        <p:blipFill>
+          <a:blip r:embed="rId3"/>
+          <a:stretch>
+            <a:fillRect/>
+          </a:stretch>
+        </p:blipFill>
+        <p:spPr>
+          <a:xfrm>
+            <a:off x="937260" y="1897380"/>
+            <a:ext cx="320040" cy="320040"/>
+          </a:xfrm>
+          <a:prstGeom prst="rect">
+            <a:avLst/>
+          </a:prstGeom>
+        </p:spPr>
+      </p:pic>
+      <p:sp>
+        <p:nvSpPr>
+          <p:cNvPr id="6" name="Text 3"/>
+          <p:cNvSpPr txBox="1"/>
+          <p:nvPr/>
+        </p:nvSpPr>
+        <p:spPr>
+          <a:xfrm>
+            <a:off x="1600200" y="1691640"/>
+            <a:ext cx="4128516" cy="731520"/>
+          </a:xfrm>
+          <a:prstGeom prst="rect">
+            <a:avLst/>
+          </a:prstGeom>
+          <a:noFill/>
+          <a:ln/>
+        </p:spPr>
+        <p:txBody>
+          <a:bodyPr wrap="square" lIns="0" tIns="0" rIns="0" bIns="0" rtlCol="0" anchor="ctr"/>
+          <a:lstStyle/>
+          <a:p>
+            <a:pPr marL="0" indent="0">
+              <a:buNone/>
+            </a:pPr>
+            <a:r>
+              <a:rPr lang="en-US" sz="2600" b="1" dirty="0">
+                <a:solidFill>
+                  <a:srgbClr val="1A5C2C"/>
+                </a:solidFill>
+                <a:latin typeface="Cambria" pitchFamily="34" charset="0"/>
+                <a:ea typeface="Cambria" pitchFamily="34" charset="-122"/>
+                <a:cs typeface="Cambria" pitchFamily="34" charset="-120"/>
+              </a:rPr>
+              <a:t>Gate 1 · Baggage Check</a:t>
+            </a:r>
+            <a:endParaRPr lang="en-US" sz="2600" dirty="0"/>
+          </a:p>
+        </p:txBody>
+      </p:sp>
+      <p:sp>
+        <p:nvSpPr>
+          <p:cNvPr id="7" name="Text 4"/>
+          <p:cNvSpPr txBox="1"/>
+          <p:nvPr/>
+        </p:nvSpPr>
+        <p:spPr>
+          <a:xfrm>
+            <a:off x="777240" y="2560320"/>
+            <a:ext cx="4951476" cy="2743200"/>
+          </a:xfrm>
+          <a:prstGeom prst="rect">
+            <a:avLst/>
+          </a:prstGeom>
+          <a:noFill/>
+          <a:ln/>
+        </p:spPr>
+        <p:txBody>
+          <a:bodyPr wrap="square" lIns="0" tIns="0" rIns="0" bIns="0" rtlCol="0" anchor="t"/>
+          <a:lstStyle/>
+          <a:p>
+            <a:pPr marL="0" indent="0">
+              <a:buNone/>
+            </a:pPr>
+            <a:r>
+              <a:rPr lang="en-US" sz="2400" dirty="0">
+                <a:solidFill>
+                  <a:srgbClr val="1F2A22"/>
+                </a:solidFill>
+                <a:latin typeface="Calibri" pitchFamily="34" charset="0"/>
+                <a:ea typeface="Calibri" pitchFamily="34" charset="-122"/>
+                <a:cs typeface="Calibri" pitchFamily="34" charset="-120"/>
+              </a:rPr>
+              <a:t>KISS mapping: what must the company keep, improve, start and stop?</a:t>
+            </a:r>
+            <a:endParaRPr lang="en-US" sz="2400" dirty="0"/>
+          </a:p>
+        </p:txBody>
+      </p:sp>
+      <p:sp>
+        <p:nvSpPr>
+          <p:cNvPr id="8" name="Shape 5"/>
+          <p:cNvSpPr/>
+          <p:nvPr/>
+        </p:nvSpPr>
+        <p:spPr>
+          <a:xfrm>
+            <a:off x="6231636" y="1508760"/>
+            <a:ext cx="5408676" cy="3931920"/>
+          </a:xfrm>
+          <a:prstGeom prst="roundRect">
+            <a:avLst>
+              <a:gd name="adj" fmla="val 2326"/>
+            </a:avLst>
+          </a:prstGeom>
+          <a:solidFill>
+            <a:srgbClr val="1A5C2C"/>
+          </a:solidFill>
+          <a:ln w="12700">
+            <a:solidFill>
+              <a:srgbClr val="1A5C2C"/>
+            </a:solidFill>
+            <a:prstDash val="solid"/>
+          </a:ln>
+        </p:spPr>
+        <p:txBody>
+          <a:bodyPr/>
+          <a:lstStyle/>
+          <a:p>
+            <a:endParaRPr lang="en-ZA"/>
+          </a:p>
+        </p:txBody>
+      </p:sp>
+      <p:sp>
+        <p:nvSpPr>
+          <p:cNvPr id="9" name="Shape 6"/>
+          <p:cNvSpPr/>
+          <p:nvPr/>
+        </p:nvSpPr>
+        <p:spPr>
+          <a:xfrm>
+            <a:off x="6460236" y="1737360"/>
+            <a:ext cx="640080" cy="640080"/>
+          </a:xfrm>
+          <a:prstGeom prst="ellipse">
+            <a:avLst/>
+          </a:prstGeom>
+          <a:solidFill>
+            <a:srgbClr val="C6A24C"/>
+          </a:solidFill>
+          <a:ln w="12700">
+            <a:solidFill>
+              <a:srgbClr val="C6A24C"/>
+            </a:solidFill>
+            <a:prstDash val="solid"/>
+          </a:ln>
+        </p:spPr>
+        <p:txBody>
+          <a:bodyPr/>
+          <a:lstStyle/>
+          <a:p>
+            <a:endParaRPr lang="en-ZA"/>
+          </a:p>
+        </p:txBody>
+      </p:sp>
+      <p:pic>
+        <p:nvPicPr>
+          <p:cNvPr id="10" name="Image 1" descr="preencoded.png"/>
+          <p:cNvPicPr>
+            <a:picLocks noChangeAspect="1"/>
+          </p:cNvPicPr>
+          <p:nvPr/>
+        </p:nvPicPr>
+        <p:blipFill>
+          <a:blip r:embed="rId4"/>
+          <a:stretch>
+            <a:fillRect/>
+          </a:stretch>
+        </p:blipFill>
+        <p:spPr>
+          <a:xfrm>
+            <a:off x="6620256" y="1897380"/>
+            <a:ext cx="320040" cy="320040"/>
+          </a:xfrm>
+          <a:prstGeom prst="rect">
+            <a:avLst/>
+          </a:prstGeom>
+        </p:spPr>
+      </p:pic>
+      <p:sp>
+        <p:nvSpPr>
+          <p:cNvPr id="11" name="Text 7"/>
+          <p:cNvSpPr txBox="1"/>
+          <p:nvPr/>
+        </p:nvSpPr>
+        <p:spPr>
+          <a:xfrm>
+            <a:off x="7283196" y="1691640"/>
+            <a:ext cx="4128516" cy="731520"/>
+          </a:xfrm>
+          <a:prstGeom prst="rect">
+            <a:avLst/>
+          </a:prstGeom>
+          <a:noFill/>
+          <a:ln/>
+        </p:spPr>
+        <p:txBody>
+          <a:bodyPr wrap="square" lIns="0" tIns="0" rIns="0" bIns="0" rtlCol="0" anchor="ctr"/>
+          <a:lstStyle/>
+          <a:p>
+            <a:pPr marL="0" indent="0">
+              <a:buNone/>
+            </a:pPr>
+            <a:r>
+              <a:rPr lang="en-US" sz="2600" b="1" dirty="0">
+                <a:solidFill>
+                  <a:srgbClr val="FFFFFF"/>
+                </a:solidFill>
+                <a:latin typeface="Cambria" pitchFamily="34" charset="0"/>
+                <a:ea typeface="Cambria" pitchFamily="34" charset="-122"/>
+                <a:cs typeface="Cambria" pitchFamily="34" charset="-120"/>
+              </a:rPr>
+              <a:t>Gate 2 · Flight Plan</a:t>
+            </a:r>
+            <a:endParaRPr lang="en-US" sz="2600" dirty="0"/>
+          </a:p>
+        </p:txBody>
+      </p:sp>
+      <p:sp>
+        <p:nvSpPr>
+          <p:cNvPr id="12" name="Text 8"/>
+          <p:cNvSpPr txBox="1"/>
+          <p:nvPr/>
+        </p:nvSpPr>
+        <p:spPr>
+          <a:xfrm>
+            <a:off x="6460236" y="2560320"/>
+            <a:ext cx="4951476" cy="2743200"/>
+          </a:xfrm>
+          <a:prstGeom prst="rect">
+            <a:avLst/>
+          </a:prstGeom>
+          <a:noFill/>
+          <a:ln/>
+        </p:spPr>
+        <p:txBody>
+          <a:bodyPr wrap="square" lIns="0" tIns="0" rIns="0" bIns="0" rtlCol="0" anchor="t"/>
+          <a:lstStyle/>
+          <a:p>
+            <a:pPr marL="0" indent="0">
+              <a:buNone/>
+            </a:pPr>
+            <a:r>
+              <a:rPr lang="en-US" sz="2400" dirty="0">
+                <a:solidFill>
+                  <a:srgbClr val="FFFFFF"/>
+                </a:solidFill>
+                <a:latin typeface="Calibri" pitchFamily="34" charset="0"/>
+                <a:ea typeface="Calibri" pitchFamily="34" charset="-122"/>
+                <a:cs typeface="Calibri" pitchFamily="34" charset="-120"/>
+              </a:rPr>
+              <a:t>OKR construction: one KISS theme becomes an Objective and two Key Results.</a:t>
+            </a:r>
+            <a:endParaRPr lang="en-US" sz="2400" dirty="0"/>
+          </a:p>
+        </p:txBody>
+      </p:sp>
+      <p:sp>
+        <p:nvSpPr>
+          <p:cNvPr id="13" name="Shape 9"/>
+          <p:cNvSpPr/>
+          <p:nvPr/>
+        </p:nvSpPr>
+        <p:spPr>
+          <a:xfrm>
+            <a:off x="548640" y="5623560"/>
+            <a:ext cx="11091672" cy="777240"/>
+          </a:xfrm>
+          <a:prstGeom prst="roundRect">
+            <a:avLst>
+              <a:gd name="adj" fmla="val 11765"/>
+            </a:avLst>
+          </a:prstGeom>
+          <a:solidFill>
+            <a:srgbClr val="0F3B1C"/>
+          </a:solidFill>
+          <a:ln w="12700">
+            <a:solidFill>
+              <a:srgbClr val="0F3B1C"/>
+            </a:solidFill>
+            <a:prstDash val="solid"/>
+          </a:ln>
+        </p:spPr>
+        <p:txBody>
+          <a:bodyPr/>
+          <a:lstStyle/>
+          <a:p>
+            <a:endParaRPr lang="en-ZA"/>
+          </a:p>
+        </p:txBody>
+      </p:sp>
+      <p:sp>
+        <p:nvSpPr>
+          <p:cNvPr id="14" name="Text 10"/>
+          <p:cNvSpPr txBox="1"/>
+          <p:nvPr/>
+        </p:nvSpPr>
+        <p:spPr>
+          <a:xfrm>
+            <a:off x="822960" y="5623560"/>
+            <a:ext cx="10607040" cy="777240"/>
+          </a:xfrm>
+          <a:prstGeom prst="rect">
+            <a:avLst/>
+          </a:prstGeom>
+          <a:noFill/>
+          <a:ln/>
+        </p:spPr>
+        <p:txBody>
+          <a:bodyPr wrap="square" lIns="0" tIns="0" rIns="0" bIns="0" rtlCol="0" anchor="ctr"/>
+          <a:lstStyle/>
+          <a:p>
+            <a:pPr marL="0" indent="0">
+              <a:buNone/>
+            </a:pPr>
+            <a:r>
+              <a:rPr lang="en-US" sz="2400" i="1" dirty="0">
+                <a:solidFill>
+                  <a:srgbClr val="FFFFFF"/>
+                </a:solidFill>
+                <a:latin typeface="Calibri" pitchFamily="34" charset="0"/>
+                <a:ea typeface="Calibri" pitchFamily="34" charset="-122"/>
+                <a:cs typeface="Calibri" pitchFamily="34" charset="-120"/>
+              </a:rPr>
+              <a:t>The case: a medical health company. One learning round.</a:t>
+            </a:r>
+            <a:endParaRPr lang="en-US" sz="2400" dirty="0"/>
+          </a:p>
+        </p:txBody>
+      </p:sp>
+    </p:spTree>
+  </p:cSld>
+  <p:clrMapOvr>
+    <a:masterClrMapping/>
+  </p:clrMapOvr>
+</p:sld>
+</file>
+
+<file path=ppt/slides/slide31.xml><?xml version="1.0" encoding="utf-8"?>
+<p:sld xmlns:a="http://schemas.openxmlformats.org/drawingml/2006/main" xmlns:r="http://schemas.openxmlformats.org/officeDocument/2006/relationships" xmlns:p="http://schemas.openxmlformats.org/presentationml/2006/main">
+  <p:cSld name="Slide 24">
+    <p:bg>
+      <p:bgPr>
+        <a:solidFill>
+          <a:srgbClr val="1A5C2C"/>
+        </a:solidFill>
+        <a:effectLst/>
+      </p:bgPr>
+    </p:bg>
+    <p:spTree>
+      <p:nvGrpSpPr>
+        <p:cNvPr id="1" name=""/>
+        <p:cNvGrpSpPr/>
+        <p:nvPr/>
+      </p:nvGrpSpPr>
+      <p:grpSpPr>
+        <a:xfrm>
+          <a:off x="0" y="0"/>
+          <a:ext cx="0" cy="0"/>
+          <a:chOff x="0" y="0"/>
+          <a:chExt cx="0" cy="0"/>
+        </a:xfrm>
+      </p:grpSpPr>
+      <p:sp>
+        <p:nvSpPr>
+          <p:cNvPr id="2" name="Text 0"/>
+          <p:cNvSpPr txBox="1"/>
+          <p:nvPr/>
+        </p:nvSpPr>
+        <p:spPr>
+          <a:xfrm>
+            <a:off x="457200" y="822960"/>
+            <a:ext cx="2103120" cy="2194560"/>
+          </a:xfrm>
+          <a:prstGeom prst="rect">
+            <a:avLst/>
+          </a:prstGeom>
+          <a:noFill/>
+          <a:ln/>
+        </p:spPr>
+        <p:txBody>
+          <a:bodyPr wrap="square" lIns="0" tIns="0" rIns="0" bIns="0" rtlCol="0" anchor="t"/>
+          <a:lstStyle/>
+          <a:p>
+            <a:pPr marL="0" indent="0">
+              <a:buNone/>
+            </a:pPr>
+            <a:r>
+              <a:rPr lang="en-US" sz="15000" b="1" dirty="0">
+                <a:solidFill>
+                  <a:srgbClr val="C6A24C"/>
+                </a:solidFill>
+                <a:latin typeface="Cambria" pitchFamily="34" charset="0"/>
+                <a:ea typeface="Cambria" pitchFamily="34" charset="-122"/>
+                <a:cs typeface="Cambria" pitchFamily="34" charset="-120"/>
+              </a:rPr>
+              <a:t>5</a:t>
+            </a:r>
+            <a:endParaRPr lang="en-US" sz="15000" dirty="0"/>
+          </a:p>
+        </p:txBody>
+      </p:sp>
+      <p:sp>
+        <p:nvSpPr>
+          <p:cNvPr id="3" name="Text 1"/>
+          <p:cNvSpPr txBox="1"/>
+          <p:nvPr/>
+        </p:nvSpPr>
+        <p:spPr>
+          <a:xfrm>
+            <a:off x="2743200" y="914400"/>
+            <a:ext cx="8229600" cy="457200"/>
+          </a:xfrm>
+          <a:prstGeom prst="rect">
+            <a:avLst/>
+          </a:prstGeom>
+          <a:noFill/>
+          <a:ln/>
+        </p:spPr>
+        <p:txBody>
+          <a:bodyPr wrap="square" lIns="0" tIns="0" rIns="0" bIns="0" rtlCol="0" anchor="t"/>
+          <a:lstStyle/>
+          <a:p>
+            <a:pPr marL="0" indent="0">
+              <a:buNone/>
+            </a:pPr>
+            <a:r>
+              <a:rPr lang="en-US" sz="2400" b="1" dirty="0">
+                <a:solidFill>
+                  <a:srgbClr val="E6D3A0"/>
+                </a:solidFill>
+                <a:latin typeface="Calibri" pitchFamily="34" charset="0"/>
+                <a:ea typeface="Calibri" pitchFamily="34" charset="-122"/>
+                <a:cs typeface="Calibri" pitchFamily="34" charset="-120"/>
+              </a:rPr>
+              <a:t>Section 5</a:t>
+            </a:r>
+            <a:endParaRPr lang="en-US" sz="2400" dirty="0"/>
+          </a:p>
+        </p:txBody>
+      </p:sp>
+      <p:sp>
+        <p:nvSpPr>
+          <p:cNvPr id="4" name="Text 2"/>
+          <p:cNvSpPr txBox="1"/>
+          <p:nvPr/>
+        </p:nvSpPr>
+        <p:spPr>
+          <a:xfrm>
+            <a:off x="2743200" y="1371600"/>
+            <a:ext cx="8961120" cy="868680"/>
+          </a:xfrm>
+          <a:prstGeom prst="rect">
+            <a:avLst/>
+          </a:prstGeom>
+          <a:noFill/>
+          <a:ln/>
+        </p:spPr>
+        <p:txBody>
+          <a:bodyPr wrap="square" lIns="0" tIns="0" rIns="0" bIns="0" rtlCol="0" anchor="t"/>
+          <a:lstStyle/>
+          <a:p>
+            <a:pPr marL="0" indent="0">
+              <a:buNone/>
+            </a:pPr>
+            <a:r>
+              <a:rPr lang="en-US" sz="4400" b="1" dirty="0">
+                <a:solidFill>
+                  <a:srgbClr val="FFFFFF"/>
+                </a:solidFill>
+                <a:latin typeface="Cambria" pitchFamily="34" charset="0"/>
+                <a:ea typeface="Cambria" pitchFamily="34" charset="-122"/>
+                <a:cs typeface="Cambria" pitchFamily="34" charset="-120"/>
+              </a:rPr>
+              <a:t>Application — In Practice</a:t>
+            </a:r>
+            <a:endParaRPr lang="en-US" sz="4400" dirty="0"/>
+          </a:p>
+        </p:txBody>
+      </p:sp>
+      <p:sp>
+        <p:nvSpPr>
+          <p:cNvPr id="5" name="Text 3"/>
+          <p:cNvSpPr txBox="1"/>
+          <p:nvPr/>
+        </p:nvSpPr>
+        <p:spPr>
+          <a:xfrm>
+            <a:off x="2743200" y="2240280"/>
+            <a:ext cx="8961120" cy="868680"/>
+          </a:xfrm>
+          <a:prstGeom prst="rect">
+            <a:avLst/>
+          </a:prstGeom>
+          <a:noFill/>
+          <a:ln/>
+        </p:spPr>
+        <p:txBody>
+          <a:bodyPr wrap="square" lIns="0" tIns="0" rIns="0" bIns="0" rtlCol="0" anchor="t"/>
+          <a:lstStyle/>
+          <a:p>
+            <a:pPr marL="0" indent="0">
+              <a:buNone/>
+            </a:pPr>
+            <a:r>
+              <a:rPr lang="en-US" sz="2600" i="1" dirty="0">
+                <a:solidFill>
+                  <a:srgbClr val="DDE8DF"/>
+                </a:solidFill>
+                <a:latin typeface="Calibri" pitchFamily="34" charset="0"/>
+                <a:ea typeface="Calibri" pitchFamily="34" charset="-122"/>
+                <a:cs typeface="Calibri" pitchFamily="34" charset="-120"/>
+              </a:rPr>
+              <a:t>Building Collective Intelligence: From SiP to KISS to Enterprise OKRs</a:t>
+            </a:r>
+            <a:endParaRPr lang="en-US" sz="2600" dirty="0"/>
+          </a:p>
+        </p:txBody>
+      </p:sp>
+      <p:sp>
+        <p:nvSpPr>
+          <p:cNvPr id="6" name="Text 4"/>
+          <p:cNvSpPr txBox="1"/>
+          <p:nvPr/>
+        </p:nvSpPr>
+        <p:spPr>
+          <a:xfrm>
+            <a:off x="2743200" y="3246120"/>
+            <a:ext cx="8229600" cy="457200"/>
+          </a:xfrm>
+          <a:prstGeom prst="rect">
+            <a:avLst/>
+          </a:prstGeom>
+          <a:noFill/>
+          <a:ln/>
+        </p:spPr>
+        <p:txBody>
+          <a:bodyPr wrap="square" lIns="0" tIns="0" rIns="0" bIns="0" rtlCol="0" anchor="t"/>
+          <a:lstStyle/>
+          <a:p>
+            <a:pPr marL="0" indent="0">
+              <a:buNone/>
+            </a:pPr>
+            <a:r>
+              <a:rPr lang="en-US" sz="2400" b="1" dirty="0">
+                <a:solidFill>
+                  <a:srgbClr val="C6A24C"/>
+                </a:solidFill>
+                <a:latin typeface="Calibri" pitchFamily="34" charset="0"/>
+                <a:ea typeface="Calibri" pitchFamily="34" charset="-122"/>
+                <a:cs typeface="Calibri" pitchFamily="34" charset="-120"/>
+              </a:rPr>
+              <a:t>Section learning outcomes</a:t>
+            </a:r>
+            <a:endParaRPr lang="en-US" sz="2400" dirty="0"/>
+          </a:p>
+        </p:txBody>
+      </p:sp>
+      <p:sp>
+        <p:nvSpPr>
+          <p:cNvPr id="7" name="Shape 5"/>
+          <p:cNvSpPr/>
+          <p:nvPr/>
+        </p:nvSpPr>
+        <p:spPr>
+          <a:xfrm>
+            <a:off x="2743200" y="3822192"/>
+            <a:ext cx="384048" cy="384048"/>
+          </a:xfrm>
+          <a:prstGeom prst="ellipse">
+            <a:avLst/>
+          </a:prstGeom>
+          <a:solidFill>
+            <a:srgbClr val="C6A24C"/>
+          </a:solidFill>
+          <a:ln w="12700">
+            <a:solidFill>
+              <a:srgbClr val="C6A24C"/>
+            </a:solidFill>
+            <a:prstDash val="solid"/>
+          </a:ln>
+        </p:spPr>
+        <p:txBody>
+          <a:bodyPr/>
+          <a:lstStyle/>
+          <a:p>
+            <a:endParaRPr lang="en-ZA"/>
+          </a:p>
+        </p:txBody>
+      </p:sp>
+      <p:pic>
+        <p:nvPicPr>
+          <p:cNvPr id="8" name="Image 0" descr="preencoded.png"/>
+          <p:cNvPicPr>
+            <a:picLocks noChangeAspect="1"/>
+          </p:cNvPicPr>
+          <p:nvPr/>
+        </p:nvPicPr>
+        <p:blipFill>
+          <a:blip r:embed="rId3"/>
+          <a:stretch>
+            <a:fillRect/>
+          </a:stretch>
+        </p:blipFill>
+        <p:spPr>
+          <a:xfrm>
+            <a:off x="2839212" y="3918204"/>
+            <a:ext cx="192024" cy="192024"/>
+          </a:xfrm>
+          <a:prstGeom prst="rect">
+            <a:avLst/>
+          </a:prstGeom>
+        </p:spPr>
+      </p:pic>
+      <p:sp>
+        <p:nvSpPr>
+          <p:cNvPr id="9" name="Text 6"/>
+          <p:cNvSpPr txBox="1"/>
+          <p:nvPr/>
+        </p:nvSpPr>
+        <p:spPr>
+          <a:xfrm>
+            <a:off x="3291840" y="3749040"/>
+            <a:ext cx="8412480" cy="1097280"/>
+          </a:xfrm>
+          <a:prstGeom prst="rect">
+            <a:avLst/>
+          </a:prstGeom>
+          <a:noFill/>
+          <a:ln/>
+        </p:spPr>
+        <p:txBody>
+          <a:bodyPr wrap="square" lIns="0" tIns="0" rIns="0" bIns="0" rtlCol="0" anchor="t"/>
+          <a:lstStyle/>
+          <a:p>
+            <a:pPr marL="0" indent="0">
+              <a:buNone/>
+            </a:pPr>
+            <a:r>
+              <a:rPr lang="en-GB" sz="2400" dirty="0">
+                <a:solidFill>
+                  <a:srgbClr val="FFFFFF"/>
+                </a:solidFill>
+                <a:latin typeface="Calibri" pitchFamily="34" charset="0"/>
+                <a:ea typeface="Calibri" pitchFamily="34" charset="-122"/>
+                <a:cs typeface="Calibri" pitchFamily="34" charset="-120"/>
+              </a:rPr>
+              <a:t>Apply the translation of </a:t>
+            </a:r>
+            <a:r>
+              <a:rPr lang="en-GB" sz="2400" dirty="0" err="1">
+                <a:solidFill>
+                  <a:srgbClr val="FFFFFF"/>
+                </a:solidFill>
+                <a:latin typeface="Calibri" pitchFamily="34" charset="0"/>
+                <a:ea typeface="Calibri" pitchFamily="34" charset="-122"/>
+                <a:cs typeface="Calibri" pitchFamily="34" charset="-120"/>
+              </a:rPr>
+              <a:t>SiP</a:t>
+            </a:r>
+            <a:r>
+              <a:rPr lang="en-GB" sz="2400" dirty="0">
+                <a:solidFill>
+                  <a:srgbClr val="FFFFFF"/>
+                </a:solidFill>
+                <a:latin typeface="Calibri" pitchFamily="34" charset="0"/>
+                <a:ea typeface="Calibri" pitchFamily="34" charset="-122"/>
+                <a:cs typeface="Calibri" pitchFamily="34" charset="-120"/>
+              </a:rPr>
+              <a:t> into OKRs as a group.</a:t>
+            </a:r>
+          </a:p>
+        </p:txBody>
+      </p:sp>
+      <p:sp>
+        <p:nvSpPr>
+          <p:cNvPr id="10" name="Shape 7"/>
+          <p:cNvSpPr/>
+          <p:nvPr/>
+        </p:nvSpPr>
+        <p:spPr>
+          <a:xfrm>
+            <a:off x="2743200" y="5010912"/>
+            <a:ext cx="384048" cy="384048"/>
+          </a:xfrm>
+          <a:prstGeom prst="ellipse">
+            <a:avLst/>
+          </a:prstGeom>
+          <a:solidFill>
+            <a:srgbClr val="C6A24C"/>
+          </a:solidFill>
+          <a:ln w="12700">
+            <a:solidFill>
+              <a:srgbClr val="C6A24C"/>
+            </a:solidFill>
+            <a:prstDash val="solid"/>
+          </a:ln>
+        </p:spPr>
+        <p:txBody>
+          <a:bodyPr/>
+          <a:lstStyle/>
+          <a:p>
+            <a:endParaRPr lang="en-ZA"/>
+          </a:p>
+        </p:txBody>
+      </p:sp>
+      <p:pic>
+        <p:nvPicPr>
+          <p:cNvPr id="11" name="Image 1" descr="preencoded.png"/>
+          <p:cNvPicPr>
+            <a:picLocks noChangeAspect="1"/>
+          </p:cNvPicPr>
+          <p:nvPr/>
+        </p:nvPicPr>
+        <p:blipFill>
+          <a:blip r:embed="rId3"/>
+          <a:stretch>
+            <a:fillRect/>
+          </a:stretch>
+        </p:blipFill>
+        <p:spPr>
+          <a:xfrm>
+            <a:off x="2839212" y="5106924"/>
+            <a:ext cx="192024" cy="192024"/>
+          </a:xfrm>
+          <a:prstGeom prst="rect">
+            <a:avLst/>
+          </a:prstGeom>
+        </p:spPr>
+      </p:pic>
+      <p:sp>
+        <p:nvSpPr>
+          <p:cNvPr id="12" name="Text 8"/>
+          <p:cNvSpPr txBox="1"/>
+          <p:nvPr/>
+        </p:nvSpPr>
+        <p:spPr>
+          <a:xfrm>
+            <a:off x="3291840" y="4937760"/>
+            <a:ext cx="8412480" cy="1097280"/>
+          </a:xfrm>
+          <a:prstGeom prst="rect">
+            <a:avLst/>
+          </a:prstGeom>
+          <a:noFill/>
+          <a:ln/>
+        </p:spPr>
+        <p:txBody>
+          <a:bodyPr wrap="square" lIns="0" tIns="0" rIns="0" bIns="0" rtlCol="0" anchor="t"/>
+          <a:lstStyle/>
+          <a:p>
+            <a:pPr marL="0" indent="0">
+              <a:buNone/>
+            </a:pPr>
+            <a:r>
+              <a:rPr lang="en-GB" sz="2400" dirty="0">
+                <a:solidFill>
+                  <a:srgbClr val="FFFFFF"/>
+                </a:solidFill>
+                <a:latin typeface="Calibri" pitchFamily="34" charset="0"/>
+                <a:ea typeface="Calibri" pitchFamily="34" charset="-122"/>
+                <a:cs typeface="Calibri" pitchFamily="34" charset="-120"/>
+              </a:rPr>
+              <a:t>Draw on collective intelligence to shape the strategic trajectory.</a:t>
+            </a:r>
+            <a:endParaRPr lang="en-US" sz="2400" dirty="0"/>
+          </a:p>
+        </p:txBody>
+      </p:sp>
+    </p:spTree>
+  </p:cSld>
+  <p:clrMapOvr>
+    <a:masterClrMapping/>
+  </p:clrMapOvr>
+</p:sld>
+</file>
+
+<file path=ppt/slides/slide32.xml><?xml version="1.0" encoding="utf-8"?>
+<p:sld xmlns:a="http://schemas.openxmlformats.org/drawingml/2006/main" xmlns:r="http://schemas.openxmlformats.org/officeDocument/2006/relationships" xmlns:p="http://schemas.openxmlformats.org/presentationml/2006/main">
   <p:cSld name="Slide 25">
     <p:bg>
       <p:bgPr>
@@ -42054,7 +42951,7 @@
 </p:sld>
 </file>
 
-<file path=ppt/slides/slide31.xml><?xml version="1.0" encoding="utf-8"?>
+<file path=ppt/slides/slide33.xml><?xml version="1.0" encoding="utf-8"?>
 <p:sld xmlns:a="http://schemas.openxmlformats.org/drawingml/2006/main" xmlns:r="http://schemas.openxmlformats.org/officeDocument/2006/relationships" xmlns:p="http://schemas.openxmlformats.org/presentationml/2006/main">
   <p:cSld>
     <p:bg>
@@ -42394,7 +43291,7 @@
                 <a:ea typeface="Cambria" pitchFamily="34" charset="-122"/>
                 <a:cs typeface="Cambria" pitchFamily="34" charset="-120"/>
               </a:rPr>
-              <a:t>4.2 Translating KISS to OKRs: The Five Steps</a:t>
+              <a:t>5.2 Translating KISS to OKRs: The Five Steps</a:t>
             </a:r>
             <a:endParaRPr lang="en-US" sz="3600" dirty="0">
               <a:latin typeface="Aptos Light" panose="020B0004020202020204" pitchFamily="34" charset="0"/>
@@ -43171,903 +44068,6 @@
         <p14:creationId xmlns:p14="http://schemas.microsoft.com/office/powerpoint/2010/main" val="1451096130"/>
       </p:ext>
     </p:extLst>
-  </p:cSld>
-  <p:clrMapOvr>
-    <a:masterClrMapping/>
-  </p:clrMapOvr>
-</p:sld>
-</file>
-
-<file path=ppt/slides/slide32.xml><?xml version="1.0" encoding="utf-8"?>
-<p:sld xmlns:a="http://schemas.openxmlformats.org/drawingml/2006/main" xmlns:r="http://schemas.openxmlformats.org/officeDocument/2006/relationships" xmlns:p="http://schemas.openxmlformats.org/presentationml/2006/main">
-  <p:cSld name="Slide 29">
-    <p:bg>
-      <p:bgPr>
-        <a:solidFill>
-          <a:srgbClr val="1A5C2C"/>
-        </a:solidFill>
-        <a:effectLst/>
-      </p:bgPr>
-    </p:bg>
-    <p:spTree>
-      <p:nvGrpSpPr>
-        <p:cNvPr id="1" name=""/>
-        <p:cNvGrpSpPr/>
-        <p:nvPr/>
-      </p:nvGrpSpPr>
-      <p:grpSpPr>
-        <a:xfrm>
-          <a:off x="0" y="0"/>
-          <a:ext cx="0" cy="0"/>
-          <a:chOff x="0" y="0"/>
-          <a:chExt cx="0" cy="0"/>
-        </a:xfrm>
-      </p:grpSpPr>
-      <p:sp>
-        <p:nvSpPr>
-          <p:cNvPr id="2" name="Text 0"/>
-          <p:cNvSpPr txBox="1"/>
-          <p:nvPr/>
-        </p:nvSpPr>
-        <p:spPr>
-          <a:xfrm>
-            <a:off x="457200" y="822960"/>
-            <a:ext cx="2103120" cy="2194560"/>
-          </a:xfrm>
-          <a:prstGeom prst="rect">
-            <a:avLst/>
-          </a:prstGeom>
-          <a:noFill/>
-          <a:ln/>
-        </p:spPr>
-        <p:txBody>
-          <a:bodyPr wrap="square" lIns="0" tIns="0" rIns="0" bIns="0" rtlCol="0" anchor="t"/>
-          <a:lstStyle/>
-          <a:p>
-            <a:pPr marL="0" indent="0">
-              <a:buNone/>
-            </a:pPr>
-            <a:r>
-              <a:rPr lang="en-US" sz="15000" b="1" dirty="0">
-                <a:solidFill>
-                  <a:srgbClr val="C6A24C"/>
-                </a:solidFill>
-                <a:latin typeface="Cambria" pitchFamily="34" charset="0"/>
-                <a:ea typeface="Cambria" pitchFamily="34" charset="-122"/>
-                <a:cs typeface="Cambria" pitchFamily="34" charset="-120"/>
-              </a:rPr>
-              <a:t>5</a:t>
-            </a:r>
-            <a:endParaRPr lang="en-US" sz="15000" dirty="0"/>
-          </a:p>
-        </p:txBody>
-      </p:sp>
-      <p:sp>
-        <p:nvSpPr>
-          <p:cNvPr id="3" name="Text 1"/>
-          <p:cNvSpPr txBox="1"/>
-          <p:nvPr/>
-        </p:nvSpPr>
-        <p:spPr>
-          <a:xfrm>
-            <a:off x="2743200" y="914400"/>
-            <a:ext cx="8229600" cy="457200"/>
-          </a:xfrm>
-          <a:prstGeom prst="rect">
-            <a:avLst/>
-          </a:prstGeom>
-          <a:noFill/>
-          <a:ln/>
-        </p:spPr>
-        <p:txBody>
-          <a:bodyPr wrap="square" lIns="0" tIns="0" rIns="0" bIns="0" rtlCol="0" anchor="t"/>
-          <a:lstStyle/>
-          <a:p>
-            <a:pPr marL="0" indent="0">
-              <a:buNone/>
-            </a:pPr>
-            <a:r>
-              <a:rPr lang="en-US" sz="2400" b="1" dirty="0">
-                <a:solidFill>
-                  <a:srgbClr val="E6D3A0"/>
-                </a:solidFill>
-                <a:latin typeface="Calibri" pitchFamily="34" charset="0"/>
-                <a:ea typeface="Calibri" pitchFamily="34" charset="-122"/>
-                <a:cs typeface="Calibri" pitchFamily="34" charset="-120"/>
-              </a:rPr>
-              <a:t>Section 5</a:t>
-            </a:r>
-            <a:endParaRPr lang="en-US" sz="2400" dirty="0"/>
-          </a:p>
-        </p:txBody>
-      </p:sp>
-      <p:sp>
-        <p:nvSpPr>
-          <p:cNvPr id="4" name="Text 2"/>
-          <p:cNvSpPr txBox="1"/>
-          <p:nvPr/>
-        </p:nvSpPr>
-        <p:spPr>
-          <a:xfrm>
-            <a:off x="2743200" y="1371600"/>
-            <a:ext cx="8961120" cy="868680"/>
-          </a:xfrm>
-          <a:prstGeom prst="rect">
-            <a:avLst/>
-          </a:prstGeom>
-          <a:noFill/>
-          <a:ln/>
-        </p:spPr>
-        <p:txBody>
-          <a:bodyPr wrap="square" lIns="0" tIns="0" rIns="0" bIns="0" rtlCol="0" anchor="t"/>
-          <a:lstStyle/>
-          <a:p>
-            <a:pPr marL="0" indent="0">
-              <a:buNone/>
-            </a:pPr>
-            <a:r>
-              <a:rPr lang="en-US" sz="4400" b="1" dirty="0">
-                <a:solidFill>
-                  <a:srgbClr val="FFFFFF"/>
-                </a:solidFill>
-                <a:latin typeface="Cambria" pitchFamily="34" charset="0"/>
-                <a:ea typeface="Cambria" pitchFamily="34" charset="-122"/>
-                <a:cs typeface="Cambria" pitchFamily="34" charset="-120"/>
-              </a:rPr>
-              <a:t>Application — In Practice</a:t>
-            </a:r>
-            <a:endParaRPr lang="en-US" sz="4400" dirty="0"/>
-          </a:p>
-        </p:txBody>
-      </p:sp>
-      <p:sp>
-        <p:nvSpPr>
-          <p:cNvPr id="5" name="Text 3"/>
-          <p:cNvSpPr txBox="1"/>
-          <p:nvPr/>
-        </p:nvSpPr>
-        <p:spPr>
-          <a:xfrm>
-            <a:off x="2743200" y="2240280"/>
-            <a:ext cx="8961120" cy="868680"/>
-          </a:xfrm>
-          <a:prstGeom prst="rect">
-            <a:avLst/>
-          </a:prstGeom>
-          <a:noFill/>
-          <a:ln/>
-        </p:spPr>
-        <p:txBody>
-          <a:bodyPr wrap="square" lIns="0" tIns="0" rIns="0" bIns="0" rtlCol="0" anchor="t"/>
-          <a:lstStyle/>
-          <a:p>
-            <a:pPr marL="0" indent="0">
-              <a:buNone/>
-            </a:pPr>
-            <a:r>
-              <a:rPr lang="en-US" sz="2600" i="1" dirty="0">
-                <a:solidFill>
-                  <a:srgbClr val="DDE8DF"/>
-                </a:solidFill>
-                <a:latin typeface="Calibri" pitchFamily="34" charset="0"/>
-                <a:ea typeface="Calibri" pitchFamily="34" charset="-122"/>
-                <a:cs typeface="Calibri" pitchFamily="34" charset="-120"/>
-              </a:rPr>
-              <a:t>Strategy Airport: From Strategic Imagination to Operational Clearance</a:t>
-            </a:r>
-            <a:endParaRPr lang="en-US" sz="2600" dirty="0"/>
-          </a:p>
-        </p:txBody>
-      </p:sp>
-      <p:sp>
-        <p:nvSpPr>
-          <p:cNvPr id="6" name="Text 4"/>
-          <p:cNvSpPr txBox="1"/>
-          <p:nvPr/>
-        </p:nvSpPr>
-        <p:spPr>
-          <a:xfrm>
-            <a:off x="2743200" y="3246120"/>
-            <a:ext cx="8229600" cy="457200"/>
-          </a:xfrm>
-          <a:prstGeom prst="rect">
-            <a:avLst/>
-          </a:prstGeom>
-          <a:noFill/>
-          <a:ln/>
-        </p:spPr>
-        <p:txBody>
-          <a:bodyPr wrap="square" lIns="0" tIns="0" rIns="0" bIns="0" rtlCol="0" anchor="t"/>
-          <a:lstStyle/>
-          <a:p>
-            <a:pPr marL="0" indent="0">
-              <a:buNone/>
-            </a:pPr>
-            <a:r>
-              <a:rPr lang="en-US" sz="2400" b="1" dirty="0">
-                <a:solidFill>
-                  <a:srgbClr val="C6A24C"/>
-                </a:solidFill>
-                <a:latin typeface="Calibri" pitchFamily="34" charset="0"/>
-                <a:ea typeface="Calibri" pitchFamily="34" charset="-122"/>
-                <a:cs typeface="Calibri" pitchFamily="34" charset="-120"/>
-              </a:rPr>
-              <a:t>Section learning outcomes</a:t>
-            </a:r>
-            <a:endParaRPr lang="en-US" sz="2400" dirty="0"/>
-          </a:p>
-        </p:txBody>
-      </p:sp>
-      <p:sp>
-        <p:nvSpPr>
-          <p:cNvPr id="7" name="Shape 5"/>
-          <p:cNvSpPr/>
-          <p:nvPr/>
-        </p:nvSpPr>
-        <p:spPr>
-          <a:xfrm>
-            <a:off x="2743200" y="3822192"/>
-            <a:ext cx="384048" cy="384048"/>
-          </a:xfrm>
-          <a:prstGeom prst="ellipse">
-            <a:avLst/>
-          </a:prstGeom>
-          <a:solidFill>
-            <a:srgbClr val="C6A24C"/>
-          </a:solidFill>
-          <a:ln w="12700">
-            <a:solidFill>
-              <a:srgbClr val="C6A24C"/>
-            </a:solidFill>
-            <a:prstDash val="solid"/>
-          </a:ln>
-        </p:spPr>
-        <p:txBody>
-          <a:bodyPr/>
-          <a:lstStyle/>
-          <a:p>
-            <a:endParaRPr lang="en-ZA"/>
-          </a:p>
-        </p:txBody>
-      </p:sp>
-      <p:pic>
-        <p:nvPicPr>
-          <p:cNvPr id="8" name="Image 0" descr="preencoded.png"/>
-          <p:cNvPicPr>
-            <a:picLocks noChangeAspect="1"/>
-          </p:cNvPicPr>
-          <p:nvPr/>
-        </p:nvPicPr>
-        <p:blipFill>
-          <a:blip r:embed="rId3"/>
-          <a:stretch>
-            <a:fillRect/>
-          </a:stretch>
-        </p:blipFill>
-        <p:spPr>
-          <a:xfrm>
-            <a:off x="2839212" y="3918204"/>
-            <a:ext cx="192024" cy="192024"/>
-          </a:xfrm>
-          <a:prstGeom prst="rect">
-            <a:avLst/>
-          </a:prstGeom>
-        </p:spPr>
-      </p:pic>
-      <p:sp>
-        <p:nvSpPr>
-          <p:cNvPr id="9" name="Text 6"/>
-          <p:cNvSpPr txBox="1"/>
-          <p:nvPr/>
-        </p:nvSpPr>
-        <p:spPr>
-          <a:xfrm>
-            <a:off x="3291840" y="3749040"/>
-            <a:ext cx="8412480" cy="1097280"/>
-          </a:xfrm>
-          <a:prstGeom prst="rect">
-            <a:avLst/>
-          </a:prstGeom>
-          <a:noFill/>
-          <a:ln/>
-        </p:spPr>
-        <p:txBody>
-          <a:bodyPr wrap="square" lIns="0" tIns="0" rIns="0" bIns="0" rtlCol="0" anchor="t"/>
-          <a:lstStyle/>
-          <a:p>
-            <a:pPr marL="0" indent="0">
-              <a:buNone/>
-            </a:pPr>
-            <a:r>
-              <a:rPr lang="en-US" sz="2400" dirty="0">
-                <a:solidFill>
-                  <a:srgbClr val="FFFFFF"/>
-                </a:solidFill>
-                <a:latin typeface="Calibri" pitchFamily="34" charset="0"/>
-                <a:ea typeface="Calibri" pitchFamily="34" charset="-122"/>
-                <a:cs typeface="Calibri" pitchFamily="34" charset="-120"/>
-              </a:rPr>
-              <a:t>Reinforce strategy translation capability.</a:t>
-            </a:r>
-          </a:p>
-        </p:txBody>
-      </p:sp>
-      <p:sp>
-        <p:nvSpPr>
-          <p:cNvPr id="10" name="Shape 7"/>
-          <p:cNvSpPr/>
-          <p:nvPr/>
-        </p:nvSpPr>
-        <p:spPr>
-          <a:xfrm>
-            <a:off x="2743200" y="5010912"/>
-            <a:ext cx="384048" cy="384048"/>
-          </a:xfrm>
-          <a:prstGeom prst="ellipse">
-            <a:avLst/>
-          </a:prstGeom>
-          <a:solidFill>
-            <a:srgbClr val="C6A24C"/>
-          </a:solidFill>
-          <a:ln w="12700">
-            <a:solidFill>
-              <a:srgbClr val="C6A24C"/>
-            </a:solidFill>
-            <a:prstDash val="solid"/>
-          </a:ln>
-        </p:spPr>
-        <p:txBody>
-          <a:bodyPr/>
-          <a:lstStyle/>
-          <a:p>
-            <a:endParaRPr lang="en-ZA"/>
-          </a:p>
-        </p:txBody>
-      </p:sp>
-      <p:pic>
-        <p:nvPicPr>
-          <p:cNvPr id="11" name="Image 1" descr="preencoded.png"/>
-          <p:cNvPicPr>
-            <a:picLocks noChangeAspect="1"/>
-          </p:cNvPicPr>
-          <p:nvPr/>
-        </p:nvPicPr>
-        <p:blipFill>
-          <a:blip r:embed="rId3"/>
-          <a:stretch>
-            <a:fillRect/>
-          </a:stretch>
-        </p:blipFill>
-        <p:spPr>
-          <a:xfrm>
-            <a:off x="2839212" y="5106924"/>
-            <a:ext cx="192024" cy="192024"/>
-          </a:xfrm>
-          <a:prstGeom prst="rect">
-            <a:avLst/>
-          </a:prstGeom>
-        </p:spPr>
-      </p:pic>
-      <p:sp>
-        <p:nvSpPr>
-          <p:cNvPr id="12" name="Text 8"/>
-          <p:cNvSpPr txBox="1"/>
-          <p:nvPr/>
-        </p:nvSpPr>
-        <p:spPr>
-          <a:xfrm>
-            <a:off x="3291840" y="4937760"/>
-            <a:ext cx="8412480" cy="1097280"/>
-          </a:xfrm>
-          <a:prstGeom prst="rect">
-            <a:avLst/>
-          </a:prstGeom>
-          <a:noFill/>
-          <a:ln/>
-        </p:spPr>
-        <p:txBody>
-          <a:bodyPr wrap="square" lIns="0" tIns="0" rIns="0" bIns="0" rtlCol="0" anchor="t"/>
-          <a:lstStyle/>
-          <a:p>
-            <a:pPr marL="0" indent="0">
-              <a:buNone/>
-            </a:pPr>
-            <a:r>
-              <a:rPr lang="en-GB" sz="2400" dirty="0">
-                <a:solidFill>
-                  <a:srgbClr val="FFFFFF"/>
-                </a:solidFill>
-                <a:latin typeface="Calibri" pitchFamily="34" charset="0"/>
-                <a:ea typeface="Calibri" pitchFamily="34" charset="-122"/>
-                <a:cs typeface="Calibri" pitchFamily="34" charset="-120"/>
-              </a:rPr>
-              <a:t>Establish individual capability to set a strategic trajectory.</a:t>
-            </a:r>
-          </a:p>
-        </p:txBody>
-      </p:sp>
-    </p:spTree>
-  </p:cSld>
-  <p:clrMapOvr>
-    <a:masterClrMapping/>
-  </p:clrMapOvr>
-</p:sld>
-</file>
-
-<file path=ppt/slides/slide33.xml><?xml version="1.0" encoding="utf-8"?>
-<p:sld xmlns:a="http://schemas.openxmlformats.org/drawingml/2006/main" xmlns:r="http://schemas.openxmlformats.org/officeDocument/2006/relationships" xmlns:p="http://schemas.openxmlformats.org/presentationml/2006/main">
-  <p:cSld name="Slide 30">
-    <p:bg>
-      <p:bgPr>
-        <a:solidFill>
-          <a:srgbClr val="FFFFFF"/>
-        </a:solidFill>
-        <a:effectLst/>
-      </p:bgPr>
-    </p:bg>
-    <p:spTree>
-      <p:nvGrpSpPr>
-        <p:cNvPr id="1" name=""/>
-        <p:cNvGrpSpPr/>
-        <p:nvPr/>
-      </p:nvGrpSpPr>
-      <p:grpSpPr>
-        <a:xfrm>
-          <a:off x="0" y="0"/>
-          <a:ext cx="0" cy="0"/>
-          <a:chOff x="0" y="0"/>
-          <a:chExt cx="0" cy="0"/>
-        </a:xfrm>
-      </p:grpSpPr>
-      <p:sp>
-        <p:nvSpPr>
-          <p:cNvPr id="2" name="Text 0"/>
-          <p:cNvSpPr txBox="1"/>
-          <p:nvPr/>
-        </p:nvSpPr>
-        <p:spPr>
-          <a:xfrm>
-            <a:off x="548640" y="411480"/>
-            <a:ext cx="11064240" cy="868680"/>
-          </a:xfrm>
-          <a:prstGeom prst="rect">
-            <a:avLst/>
-          </a:prstGeom>
-          <a:noFill/>
-          <a:ln/>
-        </p:spPr>
-        <p:txBody>
-          <a:bodyPr wrap="square" lIns="0" tIns="0" rIns="0" bIns="0" rtlCol="0" anchor="ctr"/>
-          <a:lstStyle/>
-          <a:p>
-            <a:pPr marL="0" indent="0">
-              <a:buNone/>
-            </a:pPr>
-            <a:r>
-              <a:rPr lang="en-US" sz="3600" b="1" dirty="0">
-                <a:solidFill>
-                  <a:srgbClr val="1A5C2C"/>
-                </a:solidFill>
-                <a:latin typeface="Cambria" pitchFamily="34" charset="0"/>
-                <a:ea typeface="Cambria" pitchFamily="34" charset="-122"/>
-                <a:cs typeface="Cambria" pitchFamily="34" charset="-120"/>
-              </a:rPr>
-              <a:t>5.1 · Strategy Airport</a:t>
-            </a:r>
-            <a:endParaRPr lang="en-US" sz="3600" dirty="0"/>
-          </a:p>
-        </p:txBody>
-      </p:sp>
-      <p:sp>
-        <p:nvSpPr>
-          <p:cNvPr id="3" name="Shape 1"/>
-          <p:cNvSpPr/>
-          <p:nvPr/>
-        </p:nvSpPr>
-        <p:spPr>
-          <a:xfrm>
-            <a:off x="548640" y="1508760"/>
-            <a:ext cx="5408676" cy="3931920"/>
-          </a:xfrm>
-          <a:prstGeom prst="roundRect">
-            <a:avLst>
-              <a:gd name="adj" fmla="val 2326"/>
-            </a:avLst>
-          </a:prstGeom>
-          <a:solidFill>
-            <a:srgbClr val="EEF4EF"/>
-          </a:solidFill>
-          <a:ln w="12700">
-            <a:solidFill>
-              <a:srgbClr val="EEF4EF"/>
-            </a:solidFill>
-            <a:prstDash val="solid"/>
-          </a:ln>
-        </p:spPr>
-        <p:txBody>
-          <a:bodyPr/>
-          <a:lstStyle/>
-          <a:p>
-            <a:endParaRPr lang="en-ZA"/>
-          </a:p>
-        </p:txBody>
-      </p:sp>
-      <p:sp>
-        <p:nvSpPr>
-          <p:cNvPr id="4" name="Shape 2"/>
-          <p:cNvSpPr/>
-          <p:nvPr/>
-        </p:nvSpPr>
-        <p:spPr>
-          <a:xfrm>
-            <a:off x="777240" y="1737360"/>
-            <a:ext cx="640080" cy="640080"/>
-          </a:xfrm>
-          <a:prstGeom prst="ellipse">
-            <a:avLst/>
-          </a:prstGeom>
-          <a:solidFill>
-            <a:srgbClr val="1A5C2C"/>
-          </a:solidFill>
-          <a:ln w="12700">
-            <a:solidFill>
-              <a:srgbClr val="1A5C2C"/>
-            </a:solidFill>
-            <a:prstDash val="solid"/>
-          </a:ln>
-        </p:spPr>
-        <p:txBody>
-          <a:bodyPr/>
-          <a:lstStyle/>
-          <a:p>
-            <a:endParaRPr lang="en-ZA"/>
-          </a:p>
-        </p:txBody>
-      </p:sp>
-      <p:pic>
-        <p:nvPicPr>
-          <p:cNvPr id="5" name="Image 0" descr="preencoded.png"/>
-          <p:cNvPicPr>
-            <a:picLocks noChangeAspect="1"/>
-          </p:cNvPicPr>
-          <p:nvPr/>
-        </p:nvPicPr>
-        <p:blipFill>
-          <a:blip r:embed="rId3"/>
-          <a:stretch>
-            <a:fillRect/>
-          </a:stretch>
-        </p:blipFill>
-        <p:spPr>
-          <a:xfrm>
-            <a:off x="937260" y="1897380"/>
-            <a:ext cx="320040" cy="320040"/>
-          </a:xfrm>
-          <a:prstGeom prst="rect">
-            <a:avLst/>
-          </a:prstGeom>
-        </p:spPr>
-      </p:pic>
-      <p:sp>
-        <p:nvSpPr>
-          <p:cNvPr id="6" name="Text 3"/>
-          <p:cNvSpPr txBox="1"/>
-          <p:nvPr/>
-        </p:nvSpPr>
-        <p:spPr>
-          <a:xfrm>
-            <a:off x="1600200" y="1691640"/>
-            <a:ext cx="4128516" cy="731520"/>
-          </a:xfrm>
-          <a:prstGeom prst="rect">
-            <a:avLst/>
-          </a:prstGeom>
-          <a:noFill/>
-          <a:ln/>
-        </p:spPr>
-        <p:txBody>
-          <a:bodyPr wrap="square" lIns="0" tIns="0" rIns="0" bIns="0" rtlCol="0" anchor="ctr"/>
-          <a:lstStyle/>
-          <a:p>
-            <a:pPr marL="0" indent="0">
-              <a:buNone/>
-            </a:pPr>
-            <a:r>
-              <a:rPr lang="en-US" sz="2600" b="1" dirty="0">
-                <a:solidFill>
-                  <a:srgbClr val="1A5C2C"/>
-                </a:solidFill>
-                <a:latin typeface="Cambria" pitchFamily="34" charset="0"/>
-                <a:ea typeface="Cambria" pitchFamily="34" charset="-122"/>
-                <a:cs typeface="Cambria" pitchFamily="34" charset="-120"/>
-              </a:rPr>
-              <a:t>Gate 1 · Baggage Check</a:t>
-            </a:r>
-            <a:endParaRPr lang="en-US" sz="2600" dirty="0"/>
-          </a:p>
-        </p:txBody>
-      </p:sp>
-      <p:sp>
-        <p:nvSpPr>
-          <p:cNvPr id="7" name="Text 4"/>
-          <p:cNvSpPr txBox="1"/>
-          <p:nvPr/>
-        </p:nvSpPr>
-        <p:spPr>
-          <a:xfrm>
-            <a:off x="777240" y="2560320"/>
-            <a:ext cx="4951476" cy="2743200"/>
-          </a:xfrm>
-          <a:prstGeom prst="rect">
-            <a:avLst/>
-          </a:prstGeom>
-          <a:noFill/>
-          <a:ln/>
-        </p:spPr>
-        <p:txBody>
-          <a:bodyPr wrap="square" lIns="0" tIns="0" rIns="0" bIns="0" rtlCol="0" anchor="t"/>
-          <a:lstStyle/>
-          <a:p>
-            <a:pPr marL="0" indent="0">
-              <a:buNone/>
-            </a:pPr>
-            <a:r>
-              <a:rPr lang="en-US" sz="2400" dirty="0">
-                <a:solidFill>
-                  <a:srgbClr val="1F2A22"/>
-                </a:solidFill>
-                <a:latin typeface="Calibri" pitchFamily="34" charset="0"/>
-                <a:ea typeface="Calibri" pitchFamily="34" charset="-122"/>
-                <a:cs typeface="Calibri" pitchFamily="34" charset="-120"/>
-              </a:rPr>
-              <a:t>KISS mapping: what must the company keep, improve, start and stop?</a:t>
-            </a:r>
-            <a:endParaRPr lang="en-US" sz="2400" dirty="0"/>
-          </a:p>
-        </p:txBody>
-      </p:sp>
-      <p:sp>
-        <p:nvSpPr>
-          <p:cNvPr id="8" name="Shape 5"/>
-          <p:cNvSpPr/>
-          <p:nvPr/>
-        </p:nvSpPr>
-        <p:spPr>
-          <a:xfrm>
-            <a:off x="6231636" y="1508760"/>
-            <a:ext cx="5408676" cy="3931920"/>
-          </a:xfrm>
-          <a:prstGeom prst="roundRect">
-            <a:avLst>
-              <a:gd name="adj" fmla="val 2326"/>
-            </a:avLst>
-          </a:prstGeom>
-          <a:solidFill>
-            <a:srgbClr val="1A5C2C"/>
-          </a:solidFill>
-          <a:ln w="12700">
-            <a:solidFill>
-              <a:srgbClr val="1A5C2C"/>
-            </a:solidFill>
-            <a:prstDash val="solid"/>
-          </a:ln>
-        </p:spPr>
-        <p:txBody>
-          <a:bodyPr/>
-          <a:lstStyle/>
-          <a:p>
-            <a:endParaRPr lang="en-ZA"/>
-          </a:p>
-        </p:txBody>
-      </p:sp>
-      <p:sp>
-        <p:nvSpPr>
-          <p:cNvPr id="9" name="Shape 6"/>
-          <p:cNvSpPr/>
-          <p:nvPr/>
-        </p:nvSpPr>
-        <p:spPr>
-          <a:xfrm>
-            <a:off x="6460236" y="1737360"/>
-            <a:ext cx="640080" cy="640080"/>
-          </a:xfrm>
-          <a:prstGeom prst="ellipse">
-            <a:avLst/>
-          </a:prstGeom>
-          <a:solidFill>
-            <a:srgbClr val="C6A24C"/>
-          </a:solidFill>
-          <a:ln w="12700">
-            <a:solidFill>
-              <a:srgbClr val="C6A24C"/>
-            </a:solidFill>
-            <a:prstDash val="solid"/>
-          </a:ln>
-        </p:spPr>
-        <p:txBody>
-          <a:bodyPr/>
-          <a:lstStyle/>
-          <a:p>
-            <a:endParaRPr lang="en-ZA"/>
-          </a:p>
-        </p:txBody>
-      </p:sp>
-      <p:pic>
-        <p:nvPicPr>
-          <p:cNvPr id="10" name="Image 1" descr="preencoded.png"/>
-          <p:cNvPicPr>
-            <a:picLocks noChangeAspect="1"/>
-          </p:cNvPicPr>
-          <p:nvPr/>
-        </p:nvPicPr>
-        <p:blipFill>
-          <a:blip r:embed="rId4"/>
-          <a:stretch>
-            <a:fillRect/>
-          </a:stretch>
-        </p:blipFill>
-        <p:spPr>
-          <a:xfrm>
-            <a:off x="6620256" y="1897380"/>
-            <a:ext cx="320040" cy="320040"/>
-          </a:xfrm>
-          <a:prstGeom prst="rect">
-            <a:avLst/>
-          </a:prstGeom>
-        </p:spPr>
-      </p:pic>
-      <p:sp>
-        <p:nvSpPr>
-          <p:cNvPr id="11" name="Text 7"/>
-          <p:cNvSpPr txBox="1"/>
-          <p:nvPr/>
-        </p:nvSpPr>
-        <p:spPr>
-          <a:xfrm>
-            <a:off x="7283196" y="1691640"/>
-            <a:ext cx="4128516" cy="731520"/>
-          </a:xfrm>
-          <a:prstGeom prst="rect">
-            <a:avLst/>
-          </a:prstGeom>
-          <a:noFill/>
-          <a:ln/>
-        </p:spPr>
-        <p:txBody>
-          <a:bodyPr wrap="square" lIns="0" tIns="0" rIns="0" bIns="0" rtlCol="0" anchor="ctr"/>
-          <a:lstStyle/>
-          <a:p>
-            <a:pPr marL="0" indent="0">
-              <a:buNone/>
-            </a:pPr>
-            <a:r>
-              <a:rPr lang="en-US" sz="2600" b="1" dirty="0">
-                <a:solidFill>
-                  <a:srgbClr val="FFFFFF"/>
-                </a:solidFill>
-                <a:latin typeface="Cambria" pitchFamily="34" charset="0"/>
-                <a:ea typeface="Cambria" pitchFamily="34" charset="-122"/>
-                <a:cs typeface="Cambria" pitchFamily="34" charset="-120"/>
-              </a:rPr>
-              <a:t>Gate 2 · Flight Plan</a:t>
-            </a:r>
-            <a:endParaRPr lang="en-US" sz="2600" dirty="0"/>
-          </a:p>
-        </p:txBody>
-      </p:sp>
-      <p:sp>
-        <p:nvSpPr>
-          <p:cNvPr id="12" name="Text 8"/>
-          <p:cNvSpPr txBox="1"/>
-          <p:nvPr/>
-        </p:nvSpPr>
-        <p:spPr>
-          <a:xfrm>
-            <a:off x="6460236" y="2560320"/>
-            <a:ext cx="4951476" cy="2743200"/>
-          </a:xfrm>
-          <a:prstGeom prst="rect">
-            <a:avLst/>
-          </a:prstGeom>
-          <a:noFill/>
-          <a:ln/>
-        </p:spPr>
-        <p:txBody>
-          <a:bodyPr wrap="square" lIns="0" tIns="0" rIns="0" bIns="0" rtlCol="0" anchor="t"/>
-          <a:lstStyle/>
-          <a:p>
-            <a:pPr marL="0" indent="0">
-              <a:buNone/>
-            </a:pPr>
-            <a:r>
-              <a:rPr lang="en-US" sz="2400" dirty="0">
-                <a:solidFill>
-                  <a:srgbClr val="FFFFFF"/>
-                </a:solidFill>
-                <a:latin typeface="Calibri" pitchFamily="34" charset="0"/>
-                <a:ea typeface="Calibri" pitchFamily="34" charset="-122"/>
-                <a:cs typeface="Calibri" pitchFamily="34" charset="-120"/>
-              </a:rPr>
-              <a:t>OKR construction: one KISS theme becomes an Objective and two Key Results.</a:t>
-            </a:r>
-            <a:endParaRPr lang="en-US" sz="2400" dirty="0"/>
-          </a:p>
-        </p:txBody>
-      </p:sp>
-      <p:sp>
-        <p:nvSpPr>
-          <p:cNvPr id="13" name="Shape 9"/>
-          <p:cNvSpPr/>
-          <p:nvPr/>
-        </p:nvSpPr>
-        <p:spPr>
-          <a:xfrm>
-            <a:off x="548640" y="5623560"/>
-            <a:ext cx="11091672" cy="777240"/>
-          </a:xfrm>
-          <a:prstGeom prst="roundRect">
-            <a:avLst>
-              <a:gd name="adj" fmla="val 11765"/>
-            </a:avLst>
-          </a:prstGeom>
-          <a:solidFill>
-            <a:srgbClr val="0F3B1C"/>
-          </a:solidFill>
-          <a:ln w="12700">
-            <a:solidFill>
-              <a:srgbClr val="0F3B1C"/>
-            </a:solidFill>
-            <a:prstDash val="solid"/>
-          </a:ln>
-        </p:spPr>
-        <p:txBody>
-          <a:bodyPr/>
-          <a:lstStyle/>
-          <a:p>
-            <a:endParaRPr lang="en-ZA"/>
-          </a:p>
-        </p:txBody>
-      </p:sp>
-      <p:sp>
-        <p:nvSpPr>
-          <p:cNvPr id="14" name="Text 10"/>
-          <p:cNvSpPr txBox="1"/>
-          <p:nvPr/>
-        </p:nvSpPr>
-        <p:spPr>
-          <a:xfrm>
-            <a:off x="822960" y="5623560"/>
-            <a:ext cx="10607040" cy="777240"/>
-          </a:xfrm>
-          <a:prstGeom prst="rect">
-            <a:avLst/>
-          </a:prstGeom>
-          <a:noFill/>
-          <a:ln/>
-        </p:spPr>
-        <p:txBody>
-          <a:bodyPr wrap="square" lIns="0" tIns="0" rIns="0" bIns="0" rtlCol="0" anchor="ctr"/>
-          <a:lstStyle/>
-          <a:p>
-            <a:pPr marL="0" indent="0">
-              <a:buNone/>
-            </a:pPr>
-            <a:r>
-              <a:rPr lang="en-US" sz="2400" i="1" dirty="0">
-                <a:solidFill>
-                  <a:srgbClr val="FFFFFF"/>
-                </a:solidFill>
-                <a:latin typeface="Calibri" pitchFamily="34" charset="0"/>
-                <a:ea typeface="Calibri" pitchFamily="34" charset="-122"/>
-                <a:cs typeface="Calibri" pitchFamily="34" charset="-120"/>
-              </a:rPr>
-              <a:t>The case: a medical health company. One learning round.</a:t>
-            </a:r>
-            <a:endParaRPr lang="en-US" sz="2400" dirty="0"/>
-          </a:p>
-        </p:txBody>
-      </p:sp>
-    </p:spTree>
   </p:cSld>
   <p:clrMapOvr>
     <a:masterClrMapping/>

--- a/Unit decks/Unit 03 - SiP KISS Mapping & OKR Definition.pptx
+++ b/Unit decks/Unit 03 - SiP KISS Mapping & OKR Definition.pptx
@@ -917,23 +917,11 @@
           <a:p>
             <a:r>
               <a:rPr lang="en-ZA" b="1" dirty="0"/>
-              <a:t>Facilitator line to land it:</a:t>
+              <a:t>Facilitator line to land it:“Notice that an initiative can sound useful and still sit in the wrong place. We are testing its strategic impact against the effort it requires.”</a:t>
             </a:r>
             <a:br>
               <a:rPr lang="en-ZA" dirty="0"/>
             </a:br>
-            <a:r>
-              <a:rPr lang="en-ZA" dirty="0"/>
-              <a:t>“Notice that an initiative can sound useful and still sit in the wrong place. We are testing its </a:t>
-            </a:r>
-            <a:r>
-              <a:rPr lang="en-ZA" b="1" dirty="0"/>
-              <a:t>strategic impact against the effort required</a:t>
-            </a:r>
-            <a:r>
-              <a:rPr lang="en-ZA" dirty="0"/>
-              <a:t>, not simply whether it is a good idea.”</a:t>
-            </a:r>
           </a:p>
           <a:p>
             <a:endParaRPr lang="en-GB" dirty="0"/>
@@ -1816,7 +1804,7 @@
           <a:p>
             <a:r>
               <a:rPr lang="en-GB" dirty="0"/>
-              <a:t>Take a show of hands for each problem, or quick responses in the chat, and say what the pattern in the room is.</a:t>
+              <a:t>Take a show of hands for each problem, or quick responses in the chat, and say what pattern the group shows.</a:t>
             </a:r>
           </a:p>
           <a:p>
@@ -4404,7 +4392,7 @@
           <a:p>
             <a:r>
               <a:rPr lang="en-GB" dirty="0"/>
-              <a:t>The goal is to make the systemic pattern visible before it plays out in the room."</a:t>
+              <a:t>The goal is to make the systemic pattern visible before it plays out in the group’s own work."</a:t>
             </a:r>
           </a:p>
           <a:p>
@@ -5510,7 +5498,7 @@
           <a:p>
             <a:r>
               <a:rPr lang="en-GB" b="1" dirty="0"/>
-              <a:t>3. Start the thinking in the room.</a:t>
+              <a:t>3. Start the thinking with the group.</a:t>
             </a:r>
           </a:p>
           <a:p>
@@ -6689,7 +6677,7 @@
           <a:p>
             <a:r>
               <a:rPr lang="en-GB" dirty="0"/>
-              <a:t>- Step 5: as the team debates placements, listen for disagreements about what constitutes high impact and high effort. These disagreements are where collective intelligence is built. Hold back from a quick consensus: the quality of the debate is as valuable as the final placement.</a:t>
+              <a:t>- Step 5: the group discusses each placement until it agrees what counts as high impact and high effort for its strategy. These discussions are where collective intelligence is built, so the group takes the time it needs: the quality of the discussion is as valuable as the final placement.</a:t>
             </a:r>
           </a:p>
           <a:p>
@@ -8419,7 +8407,7 @@
             </a:r>
             <a:r>
               <a:rPr lang="en-GB" dirty="0"/>
-              <a:t>"START identifies new practices, capabilities, or initiatives that do not yet exist but will be necessary for the organisation to operate in the way described in the SiP.</a:t>
+              <a:t>"START identifies new practices, capabilities, or initiatives the organisation will need for the organisation to operate in the way described in the SiP.</a:t>
             </a:r>
           </a:p>
           <a:p>
@@ -9450,7 +9438,7 @@
           <a:p>
             <a:r>
               <a:rPr lang="en-GB" dirty="0"/>
-              <a:t>This single test is the most useful tool in the room. Return to it every time a task appears dressed as a Key Result.</a:t>
+              <a:t>This single test is the most useful tool in the session. Return to it every time a task appears dressed as a Key Result.</a:t>
             </a:r>
           </a:p>
           <a:p>

--- a/Unit decks/Unit 03 - SiP KISS Mapping & OKR Definition.pptx
+++ b/Unit decks/Unit 03 - SiP KISS Mapping & OKR Definition.pptx
@@ -1489,13 +1489,13 @@
           <a:p>
             <a:r>
               <a:rPr lang="en-GB" dirty="0"/>
-              <a:t>1. Map the strategic terrain before setting goals.</a:t>
-            </a:r>
-          </a:p>
-          <a:p>
-            <a:r>
-              <a:rPr lang="en-GB" dirty="0"/>
-              <a:t>2. Practise the translation of SiP into OKRs.</a:t>
+              <a:t>1. Assess the strategic changes required before committing to performance targets.</a:t>
+            </a:r>
+          </a:p>
+          <a:p>
+            <a:r>
+              <a:rPr lang="en-GB" dirty="0"/>
+              <a:t>2. Derive measurable results that are traceable to Success in Practice.</a:t>
             </a:r>
           </a:p>
           <a:p>
@@ -4359,13 +4359,13 @@
           <a:p>
             <a:r>
               <a:rPr lang="en-GB" dirty="0"/>
-              <a:t>1. Recognise how each leadership function’s emphasis shapes the priorities it proposes.</a:t>
-            </a:r>
-          </a:p>
-          <a:p>
-            <a:r>
-              <a:rPr lang="en-GB" dirty="0"/>
-              <a:t>2. Distinguish functional contributions from the enterprise priorities they serve.</a:t>
+              <a:t>1. Challenge functional preferences that distort enterprise priority-setting.</a:t>
+            </a:r>
+          </a:p>
+          <a:p>
+            <a:r>
+              <a:rPr lang="en-GB" dirty="0"/>
+              <a:t>2. Align functional contributions with enterprise-wide strategic priorities.</a:t>
             </a:r>
           </a:p>
           <a:p>
@@ -5751,7 +5751,7 @@
                 <a:ea typeface="+mn-ea"/>
                 <a:cs typeface="+mn-cs"/>
               </a:rPr>
-              <a:t>Apply the translation of </a:t>
+              <a:t>Negotiate a coherent set of enterprise objectives and results across the leadership team.</a:t>
             </a:r>
             <a:r>
               <a:rPr lang="en-ZA" sz="1200" b="0" i="0" kern="1200" dirty="0" err="1">
@@ -5763,7 +5763,7 @@
                 <a:ea typeface="+mn-ea"/>
                 <a:cs typeface="+mn-cs"/>
               </a:rPr>
-              <a:t>SiP</a:t>
+              <a:t/>
             </a:r>
             <a:r>
               <a:rPr lang="en-ZA" sz="1200" b="0" i="0" kern="1200" dirty="0">
@@ -5775,7 +5775,7 @@
                 <a:ea typeface="+mn-ea"/>
                 <a:cs typeface="+mn-cs"/>
               </a:rPr>
-              <a:t> into OKRs as a group.</a:t>
+              <a:t/>
             </a:r>
           </a:p>
           <a:p>
@@ -5790,7 +5790,7 @@
                 <a:ea typeface="+mn-ea"/>
                 <a:cs typeface="+mn-cs"/>
               </a:rPr>
-              <a:t>Draw on collective intelligence to shape the strategic trajectory.</a:t>
+              <a:t>Integrate diverse executive perspectives into a shared strategic trajectory.</a:t>
             </a:r>
           </a:p>
           <a:p>
@@ -6876,7 +6876,7 @@
                 <a:ea typeface="+mn-ea"/>
                 <a:cs typeface="+mn-cs"/>
               </a:rPr>
-              <a:t>Translate strategic intent into measurable results for their own strategy.</a:t>
+              <a:t>Translate strategic intent into execution-ready objectives and key results.</a:t>
             </a:r>
           </a:p>
           <a:p>
@@ -6891,7 +6891,7 @@
                 <a:ea typeface="+mn-ea"/>
                 <a:cs typeface="+mn-cs"/>
               </a:rPr>
-              <a:t>Set a strategic trajectory with clear objectives and measurable results.</a:t>
+              <a:t>Construct a measurable strategic trajectory from the intended future position.</a:t>
             </a:r>
           </a:p>
           <a:p>
@@ -7889,13 +7889,13 @@
           <a:p>
             <a:r>
               <a:rPr lang="en-GB" dirty="0"/>
-              <a:t>1. Distinguish the current practices that reinforce strategic progress from those that constrain it.</a:t>
-            </a:r>
-          </a:p>
-          <a:p>
-            <a:r>
-              <a:rPr lang="en-GB" dirty="0"/>
-              <a:t>2. T</a:t>
+              <a:t>1. Evaluate organisational practices and determine what should be sustained or changed.</a:t>
+            </a:r>
+          </a:p>
+          <a:p>
+            <a:r>
+              <a:rPr lang="en-GB" dirty="0"/>
+              <a:t>2. Translate strategic intent into outcomes that can be meaningfully measured.</a:t>
             </a:r>
             <a:r>
               <a:rPr lang="en-ZA" sz="1200" b="0" i="0" kern="1200" dirty="0" err="1">
@@ -7907,7 +7907,7 @@
                 <a:ea typeface="+mn-ea"/>
                 <a:cs typeface="+mn-cs"/>
               </a:rPr>
-              <a:t>ranslate</a:t>
+              <a:t/>
             </a:r>
             <a:r>
               <a:rPr lang="en-ZA" sz="1200" b="0" i="0" kern="1200" dirty="0">
@@ -7919,7 +7919,7 @@
                 <a:ea typeface="+mn-ea"/>
                 <a:cs typeface="+mn-cs"/>
               </a:rPr>
-              <a:t> the intent to measurable results.</a:t>
+              <a:t/>
             </a:r>
             <a:endParaRPr lang="en-GB" dirty="0"/>
           </a:p>
@@ -18311,7 +18311,7 @@
                 <a:ea typeface="Calibri" pitchFamily="34" charset="-122"/>
                 <a:cs typeface="Calibri" pitchFamily="34" charset="-120"/>
               </a:rPr>
-              <a:t>Map the strategic terrain before setting goals.</a:t>
+              <a:t>Assess the strategic changes required before committing to performance targets.</a:t>
             </a:r>
             <a:endParaRPr lang="en-US" sz="2400" dirty="0"/>
           </a:p>
@@ -18406,7 +18406,7 @@
                 <a:ea typeface="Calibri" pitchFamily="34" charset="-122"/>
                 <a:cs typeface="Calibri" pitchFamily="34" charset="-120"/>
               </a:rPr>
-              <a:t>Practise the translation of SiP into OKRs.</a:t>
+              <a:t>Derive measurable results that are traceable to Success in Practice.</a:t>
             </a:r>
             <a:endParaRPr lang="en-US" sz="2400" dirty="0"/>
           </a:p>
@@ -27609,7 +27609,7 @@
                 <a:ea typeface="Calibri" pitchFamily="34" charset="-122"/>
                 <a:cs typeface="Calibri" pitchFamily="34" charset="-120"/>
               </a:rPr>
-              <a:t>Distinguish the organisational practices that reinforce strategic progress from those that constrain it.</a:t>
+              <a:t>Evaluate existing practices to determine which advance or obstruct strategic progress.</a:t>
             </a:r>
             <a:endParaRPr lang="en-US" sz="2400" dirty="0"/>
           </a:p>
@@ -27704,7 +27704,7 @@
                 <a:ea typeface="Calibri" pitchFamily="34" charset="-122"/>
                 <a:cs typeface="Calibri" pitchFamily="34" charset="-120"/>
               </a:rPr>
-              <a:t>Determine the enterprise priorities required to advance from the current position to the intended future state.</a:t>
+              <a:t>Prioritise enterprise changes that bridge the current position and intended future.</a:t>
             </a:r>
             <a:endParaRPr lang="en-US" sz="2400" dirty="0"/>
           </a:p>
@@ -27799,7 +27799,7 @@
                 <a:ea typeface="Calibri" pitchFamily="34" charset="-122"/>
                 <a:cs typeface="Calibri" pitchFamily="34" charset="-120"/>
               </a:rPr>
-              <a:t>Formulate clear and measurable outcomes that express the strategic priorities of the organisation.</a:t>
+              <a:t>Formulate measurable strategic outcomes that provide reliable evidence of progress.</a:t>
             </a:r>
             <a:endParaRPr lang="en-US" sz="2400" dirty="0"/>
           </a:p>
@@ -27894,7 +27894,7 @@
                 <a:ea typeface="Calibri" pitchFamily="34" charset="-122"/>
                 <a:cs typeface="Calibri" pitchFamily="34" charset="-120"/>
               </a:rPr>
-              <a:t>Establish a clear relationship between strategic ambition, organisational contribution and evidence of progress.</a:t>
+              <a:t>Establish a clear line of sight from strategic ambition through contributions to measurable results.</a:t>
             </a:r>
             <a:endParaRPr lang="en-US" sz="2400" dirty="0"/>
           </a:p>
@@ -33010,7 +33010,7 @@
                 <a:ea typeface="Calibri" pitchFamily="34" charset="-122"/>
                 <a:cs typeface="Calibri" pitchFamily="34" charset="-120"/>
               </a:rPr>
-              <a:t>Recognise how each leadership function’s emphasis shapes the priorities it proposes.</a:t>
+              <a:t>Challenge functional preferences that distort enterprise priority-setting.</a:t>
             </a:r>
             <a:endParaRPr lang="en-US" sz="2400" dirty="0"/>
           </a:p>
@@ -33105,7 +33105,7 @@
                 <a:ea typeface="Calibri" pitchFamily="34" charset="-122"/>
                 <a:cs typeface="Calibri" pitchFamily="34" charset="-120"/>
               </a:rPr>
-              <a:t>Distinguish functional contributions from the enterprise priorities they serve.</a:t>
+              <a:t>Align functional contributions with enterprise-wide strategic priorities.</a:t>
             </a:r>
             <a:endParaRPr lang="en-US" sz="2400" dirty="0"/>
           </a:p>
@@ -39469,7 +39469,7 @@
                 <a:ea typeface="Calibri" pitchFamily="34" charset="-122"/>
                 <a:cs typeface="Calibri" pitchFamily="34" charset="-120"/>
               </a:rPr>
-              <a:t>Translate strategic intent into measurable results for their own strategy.</a:t>
+              <a:t>Translate strategic intent into execution-ready objectives and key results.</a:t>
             </a:r>
           </a:p>
         </p:txBody>
@@ -39563,7 +39563,7 @@
                 <a:ea typeface="Calibri" pitchFamily="34" charset="-122"/>
                 <a:cs typeface="Calibri" pitchFamily="34" charset="-120"/>
               </a:rPr>
-              <a:t>Set a strategic trajectory with clear objectives and measurable results.</a:t>
+              <a:t>Construct a measurable strategic trajectory from the intended future position.</a:t>
             </a:r>
           </a:p>
         </p:txBody>
@@ -40968,7 +40968,7 @@
                 <a:ea typeface="Calibri" pitchFamily="34" charset="-122"/>
                 <a:cs typeface="Calibri" pitchFamily="34" charset="-120"/>
               </a:rPr>
-              <a:t>Apply the translation of </a:t>
+              <a:t>Negotiate a coherent set of enterprise objectives and results across the leadership team.</a:t>
             </a:r>
             <a:r>
               <a:rPr lang="en-GB" sz="2400" dirty="0" err="1">
@@ -40979,7 +40979,7 @@
                 <a:ea typeface="Calibri" pitchFamily="34" charset="-122"/>
                 <a:cs typeface="Calibri" pitchFamily="34" charset="-120"/>
               </a:rPr>
-              <a:t>SiP</a:t>
+              <a:t/>
             </a:r>
             <a:r>
               <a:rPr lang="en-GB" sz="2400" dirty="0">
@@ -40990,7 +40990,7 @@
                 <a:ea typeface="Calibri" pitchFamily="34" charset="-122"/>
                 <a:cs typeface="Calibri" pitchFamily="34" charset="-120"/>
               </a:rPr>
-              <a:t> into OKRs as a group.</a:t>
+              <a:t/>
             </a:r>
           </a:p>
         </p:txBody>
@@ -41084,7 +41084,7 @@
                 <a:ea typeface="Calibri" pitchFamily="34" charset="-122"/>
                 <a:cs typeface="Calibri" pitchFamily="34" charset="-120"/>
               </a:rPr>
-              <a:t>Draw on collective intelligence to shape the strategic trajectory.</a:t>
+              <a:t>Integrate diverse executive perspectives into a shared strategic trajectory.</a:t>
             </a:r>
             <a:endParaRPr lang="en-US" sz="2400" dirty="0"/>
           </a:p>
@@ -44539,7 +44539,7 @@
                 <a:ea typeface="Calibri" pitchFamily="34" charset="-122"/>
                 <a:cs typeface="Calibri" pitchFamily="34" charset="-120"/>
               </a:rPr>
-              <a:t>Distinguish the current practices that reinforce strategic progress from those that constrain it.</a:t>
+              <a:t>Evaluate organisational practices and determine what should be sustained or changed.</a:t>
             </a:r>
             <a:endParaRPr lang="en-US" sz="2400" dirty="0"/>
           </a:p>
@@ -44634,7 +44634,7 @@
                 <a:ea typeface="Calibri" pitchFamily="34" charset="-122"/>
                 <a:cs typeface="Calibri" pitchFamily="34" charset="-120"/>
               </a:rPr>
-              <a:t>Translate the intent to measurable results.</a:t>
+              <a:t>Translate strategic intent into outcomes that can be meaningfully measured.</a:t>
             </a:r>
             <a:endParaRPr lang="en-US" sz="2400" dirty="0"/>
           </a:p>

--- a/Unit decks/Unit 03 - SiP KISS Mapping & OKR Definition.pptx
+++ b/Unit decks/Unit 03 - SiP KISS Mapping & OKR Definition.pptx
@@ -358,13 +358,13 @@
           <a:p>
             <a:r>
               <a:rPr lang="en-GB" dirty="0"/>
-              <a:t>3. Section 5 on the portal is group work for the Capstone. The group agrees each entry and one member acts as scribe.</a:t>
-            </a:r>
-          </a:p>
-          <a:p>
-            <a:r>
-              <a:rPr lang="en-GB" dirty="0"/>
-              <a:t>Every member then types the agreed entries into their own page.</a:t>
+              <a:t>3. Section 5 on the portal is group work for the Capstone. The group chooses its scribe for this work.</a:t>
+            </a:r>
+          </a:p>
+          <a:p>
+            <a:r>
+              <a:rPr lang="en-GB" dirty="0"/>
+              <a:t>The scribe types what the group agrees, the entries appear on every member’s page, and each member then selects Agree.</a:t>
             </a:r>
           </a:p>
           <a:p>
@@ -5667,7 +5667,7 @@
           <a:p>
             <a:r>
               <a:rPr lang="en-GB" dirty="0"/>
-              <a:t>1. 5.1a: how the group works. One scribe, agreed entries, every member’s own page.</a:t>
+              <a:t>1. 5.1a: how the group works. One scribe per assignment; the agreed entries appear on every member’s page.</a:t>
             </a:r>
           </a:p>
           <a:p>
@@ -6210,13 +6210,13 @@
           <a:p>
             <a:r>
               <a:rPr lang="en-GB" dirty="0"/>
-              <a:t>One member acts as scribe and types the agreed wording.</a:t>
-            </a:r>
-          </a:p>
-          <a:p>
-            <a:r>
-              <a:rPr lang="en-GB" dirty="0"/>
-              <a:t>Every member then types the agreed entries into their own page, in the session or after it."</a:t>
+              <a:t>The group chooses its scribe, who types the agreed wording.</a:t>
+            </a:r>
+          </a:p>
+          <a:p>
+            <a:r>
+              <a:rPr lang="en-GB" dirty="0"/>
+              <a:t>The entries appear on every member’s page, and each member then selects Agree."</a:t>
             </a:r>
           </a:p>
           <a:p>
@@ -6274,7 +6274,7 @@
                 <a:ea typeface="+mn-ea"/>
                 <a:cs typeface="+mn-cs"/>
               </a:rPr>
-              <a:t>The group agrees each entry and one member acts as scribe. Every member then types the agreed entries into their own page of the participant file, in the session or after it. The confirmed Keep, Improve, Start and Stop feed the team's Capstone Blueprint.</a:t>
+              <a:t>The group chooses its scribe for this work. The scribe types what the group agrees, and the entries appear on every member’s page. When every member has agreed, the Keep, Improve, Start and Stop feed the team's Capstone Blueprint.</a:t>
             </a:r>
           </a:p>
           <a:p>
@@ -6644,7 +6644,7 @@
           <a:p>
             <a:r>
               <a:rPr lang="en-GB" dirty="0"/>
-              <a:t>The group agrees each entry, and every member types the agreed entries into their own page.</a:t>
+              <a:t>The group agrees each entry; the scribe types it, and it appears on every member’s page.</a:t>
             </a:r>
           </a:p>
           <a:p>

--- a/Unit decks/Unit 03 - SiP KISS Mapping & OKR Definition.pptx
+++ b/Unit decks/Unit 03 - SiP KISS Mapping & OKR Definition.pptx
@@ -415,7 +415,7 @@
           <a:p>
             <a:r>
               <a:rPr lang="en-GB" dirty="0"/>
-              <a:t>- The confirmed KISS map, Enterprise Priorities and Enterprise OKRs feed the team’s Capstone Blueprint.</a:t>
+              <a:t>- The confirmed KISS map, Enterprise Priorities and Enterprise OKRs feed the team’s Capstone S2R Blueprint.</a:t>
             </a:r>
           </a:p>
           <a:p>
@@ -6274,7 +6274,7 @@
                 <a:ea typeface="+mn-ea"/>
                 <a:cs typeface="+mn-cs"/>
               </a:rPr>
-              <a:t>The group chooses its scribe for this work. The scribe types what the group agrees, and the entries appear on every member’s page. When every member has agreed, the Keep, Improve, Start and Stop feed the team's Capstone Blueprint.</a:t>
+              <a:t>The group chooses its scribe for this work. The scribe types what the group agrees, and the entries appear on every member’s page. When every member has agreed, the Keep, Improve, Start and Stop feed the team's Capstone S2R Blueprint.</a:t>
             </a:r>
           </a:p>
           <a:p>
@@ -7588,7 +7588,7 @@
           <a:p>
             <a:r>
               <a:rPr lang="en-GB" dirty="0"/>
-              <a:t>The confirmed outputs feed the team's Capstone Blueprint.</a:t>
+              <a:t>The confirmed outputs feed the team's Capstone S2R Blueprint.</a:t>
             </a:r>
           </a:p>
           <a:p>
@@ -7705,7 +7705,7 @@
           <a:p>
             <a:r>
               <a:rPr lang="en-GB" dirty="0"/>
-              <a:t>- Note the groups whose members hold different versions of an output. Ask them to agree one version and update their pages before the team opens its Capstone Blueprint.</a:t>
+              <a:t>- Note the groups whose members hold different versions of an output. Ask them to agree one version and update their pages before the team opens its Capstone S2R Blueprint.</a:t>
             </a:r>
           </a:p>
         </p:txBody>

--- a/Unit decks/Unit 03 - SiP KISS Mapping & OKR Definition.pptx
+++ b/Unit decks/Unit 03 - SiP KISS Mapping & OKR Definition.pptx
@@ -6688,6 +6688,11 @@
           <a:p>
             <a:r>
               <a:t>- After all four domains are captured, ask the group: "Look across all four domains. What are the two or three patterns that keep appearing? What does the organisation most consistently need to start, stop or improve relative to the SiP?" These patterns become the strategic themes of 5.2.</a:t>
+            </a:r>
+          </a:p>
+          <a:p>
+            <a:r>
+              <a:t>Close the group work with Our Position. Say: "When your record is complete, write as a group a short summary statement of your team's position from this unit, in the unit's own terms. Every member agrees it with the rest of the record. It closes this unit's section of your Capstone S2R Blueprint and guides the assessors through your work."</a:t>
             </a:r>
           </a:p>
         </p:txBody>
